--- a/Lessons/06_knn_naive_bayes_svm/Slides/knn_naive_bayes_svm_slides.pptx
+++ b/Lessons/06_knn_naive_bayes_svm/Slides/knn_naive_bayes_svm_slides.pptx
@@ -12950,7 +12950,7 @@
             </a:r>
             <a:r>
               <a:rPr/>
-              <a:t> — remember everything, and vote</a:t>
+              <a:t> — remember, and vote</a:t>
             </a:r>
           </a:p>
           <a:p>
@@ -12965,7 +12965,7 @@
             </a:r>
             <a:r>
               <a:rPr/>
-              <a:t>, which is the bill for that</a:t>
+              <a:t>: the bill for that</a:t>
             </a:r>
           </a:p>
           <a:p>
@@ -12976,7 +12976,7 @@
             </a:r>
             <a:r>
               <a:rPr/>
-              <a:t> — one very strong assumption, bought very cheaply</a:t>
+              <a:t> — one strong assumption, bought cheap</a:t>
             </a:r>
           </a:p>
           <a:p>
@@ -12987,14 +12987,14 @@
             </a:r>
             <a:r>
               <a:rPr/>
-              <a:t> — margins, and changing coordinates</a:t>
+              <a:t> — margins, and kernels</a:t>
             </a:r>
           </a:p>
           <a:p>
             <a:pPr lvl="0"/>
             <a:r>
               <a:rPr/>
-              <a:t>Which family to reach for, and why that matters more than tuning</a:t>
+              <a:t>Which family to reach for, and why that beats tuning</a:t>
             </a:r>
           </a:p>
         </p:txBody>
@@ -16396,11 +16396,11 @@
             <a:pPr lvl="0"/>
             <a:r>
               <a:rPr b="1"/>
-              <a:t>No straight line separates the pumps</a:t>
-            </a:r>
-            <a:r>
-              <a:rPr/>
-              <a:t> — both linear models score exactly 0.613, with zero variance across folds</a:t>
+              <a:t>No line separates the pumps</a:t>
+            </a:r>
+            <a:r>
+              <a:rPr/>
+              <a:t>: 0.613, the base rate</a:t>
             </a:r>
           </a:p>
           <a:p>
@@ -16411,25 +16411,25 @@
             </a:r>
             <a:r>
               <a:rPr/>
-              <a:t>, and training accuracy at k = 1 is 1.000 and means nothing</a:t>
+              <a:t>, made visible</a:t>
             </a:r>
           </a:p>
           <a:p>
             <a:pPr lvl="0"/>
             <a:r>
               <a:rPr b="1"/>
-              <a:t>In 100 dimensions the nearest point is 70% as far away as the farthest</a:t>
+              <a:t>In 100 dimensions the nearest point is 70% as far as the farthest</a:t>
             </a:r>
           </a:p>
           <a:p>
             <a:pPr lvl="0"/>
             <a:r>
               <a:rPr b="1"/>
-              <a:t>Naive Bayes assumes independence given the class</a:t>
-            </a:r>
-            <a:r>
-              <a:rPr/>
-              <a:t> — 0.933 where it holds, </a:t>
+              <a:t>Naive Bayes</a:t>
+            </a:r>
+            <a:r>
+              <a:rPr/>
+              <a:t>: 0.933 where independence holds, </a:t>
             </a:r>
             <a:r>
               <a:rPr b="1"/>
@@ -16437,7 +16437,7 @@
             </a:r>
             <a:r>
               <a:rPr/>
-              <a:t> where the signal is an interaction</a:t>
+              <a:t> where it does not</a:t>
             </a:r>
           </a:p>
           <a:p>

--- a/Lessons/06_knn_naive_bayes_svm/Slides/knn_naive_bayes_svm_slides.pptx
+++ b/Lessons/06_knn_naive_bayes_svm/Slides/knn_naive_bayes_svm_slides.pptx
@@ -589,7 +589,7 @@
             </a:pPr>
             <a:r>
               <a:rPr/>
-              <a:t>There was more than one problem planted. Ask out loud how many people found the second one, and how many stopped after the first — stopping after the first is the realistic failure, because once a score drops from excellent to plausible the pressure to keep looking disappears.</a:t>
+              <a:t>There was more than one problem planted. Ask out loud how many people found the second one, and how many stopped after the first - stopping after the first is the realistic failure, because once a score drops from excellent to plausible the pressure to keep looking disappears.</a:t>
             </a:r>
           </a:p>
           <a:p>
@@ -713,7 +713,7 @@
             </a:pPr>
             <a:r>
               <a:rPr/>
-              <a:t>The best value is k = 5, at 0.944 — wide enough to average out the flipped labels, narrow enough to still follow the boundary. Note that it is not dramatically better than 15 or 51: the choice of k is forgiving over a wide range, which is worth saying because they will otherwise grid-search it to death.</a:t>
+              <a:t>The best value is k = 5, at 0.944 - wide enough to average out the flipped labels, narrow enough to still follow the boundary. Note that it is not dramatically better than 15 or 51: the choice of k is forgiving over a wide range, which is worth saying because they will otherwise grid-search it to death.</a:t>
             </a:r>
           </a:p>
           <a:p>
@@ -961,7 +961,7 @@
             </a:pPr>
             <a:r>
               <a:rPr/>
-              <a:t>k = 1: the boundary is ragged, with islands around individual points. Those islands are the mislabelled 4% — the model has carved out a small territory for each one. That is variance made visible.</a:t>
+              <a:t>k = 1: the boundary is ragged, with islands around individual points. Those islands are the mislabelled 4% - the model has carved out a small territory for each one. That is variance made visible.</a:t>
             </a:r>
           </a:p>
           <a:p>
@@ -1085,7 +1085,7 @@
             </a:pPr>
             <a:r>
               <a:rPr/>
-              <a:t>The first cost is engineering. For 1,200 pumps it is nothing. For ten million rows answering a thousand queries a second it is the entire problem, and it is why approximate nearest-neighbour indexes are a small industry. Mention that the scikit-learn default uses a k-d tree or ball tree, which helps in low dimensions and stops helping in high ones — for reasons that are the next segment.</a:t>
+              <a:t>The first cost is engineering. For 1,200 pumps it is nothing. For ten million rows answering a thousand queries a second it is the entire problem, and it is why approximate nearest-neighbour indexes are a small industry. Mention that the scikit-learn default uses a k-d tree or ball tree, which helps in low dimensions and stops helping in high ones - for reasons that are the next segment.</a:t>
             </a:r>
           </a:p>
           <a:p>
@@ -1113,7 +1113,7 @@
             </a:pPr>
             <a:r>
               <a:rPr/>
-              <a:t>Spell out what that means when the training set is medical records or customer transactions. Shipping the model means shipping the data — to a phone, to a customer’s server, to a third party. That is a legal question before it is a technical one. This lesson’s Resources document and lesson 2’s cover it.</a:t>
+              <a:t>Spell out what that means when the training set is medical records or customer transactions. Shipping the model means shipping the data - to a phone, to a customer’s server, to a third party. That is a legal question before it is a technical one. This lesson’s Resources document and lesson 2’s cover it.</a:t>
             </a:r>
           </a:p>
         </p:txBody>
@@ -1209,7 +1209,7 @@
             </a:pPr>
             <a:r>
               <a:rPr/>
-              <a:t>Say it twice if necessary: the signal is still there. Both original columns are present, unmodified, and still sufficient to solve the problem perfectly. We are adding columns that contain nothing — no relationship to the label, no relationship to each other.</a:t>
+              <a:t>Say it twice if necessary: the signal is still there. Both original columns are present, unmodified, and still sufficient to solve the problem perfectly. We are adding columns that contain nothing - no relationship to the label, no relationship to each other.</a:t>
             </a:r>
           </a:p>
           <a:p>
@@ -1333,7 +1333,7 @@
             </a:pPr>
             <a:r>
               <a:rPr/>
-              <a:t>At 52 columns — that is 2 real and 50 empty — k-NN is BELOW the majority baseline. A model that ignored the data entirely and always answered “faulty” would now do better than a model that looked at it.</a:t>
+              <a:t>At 52 columns - that is 2 real and 50 empty - k-NN is BELOW the majority baseline. A model that ignored the data entirely and always answered “faulty” would now do better than a model that looked at it.</a:t>
             </a:r>
           </a:p>
           <a:p>
@@ -1719,7 +1719,7 @@
             </a:pPr>
             <a:r>
               <a:rPr/>
-              <a:t>Start at the top. In two dimensions the nearest point is about 2% as far away as the farthest. “Nearest” is a strong claim there — it picks out something genuinely special.</a:t>
+              <a:t>Start at the top. In two dimensions the nearest point is about 2% as far away as the farthest. “Nearest” is a strong claim there - it picks out something genuinely special.</a:t>
             </a:r>
           </a:p>
           <a:p>
@@ -1857,7 +1857,7 @@
             </a:pPr>
             <a:r>
               <a:rPr/>
-              <a:t>And then the sentence that makes it operational: if the nearest five points are barely nearer than five chosen at random, a majority vote among them is barely different from a majority vote among five random labels — which is the base rate, which is exactly what the 52-column row showed.</a:t>
+              <a:t>And then the sentence that makes it operational: if the nearest five points are barely nearer than five chosen at random, a majority vote among them is barely different from a majority vote among five random labels - which is the base rate, which is exactly what the 52-column row showed.</a:t>
             </a:r>
           </a:p>
           <a:p>
@@ -2105,7 +2105,7 @@
             </a:pPr>
             <a:r>
               <a:rPr/>
-              <a:t>Neural networks work happily in thousands of dimensions. So do linear models with regularisation. What breaks is specifically the family of methods whose mechanism is a distance, because a quantity that no longer varies can no longer discriminate. Name the three that appear in this course: k-NN today, k-means in lesson 8, and the RBF kernel later this afternoon — which is why the RBF SVM also degraded in that table, though more slowly.</a:t>
+              <a:t>Neural networks work happily in thousands of dimensions. So do linear models with regularisation. What breaks is specifically the family of methods whose mechanism is a distance, because a quantity that no longer varies can no longer discriminate. Name the three that appear in this course: k-NN today, k-means in lesson 8, and the RBF kernel later this afternoon - which is why the RBF SVM also degraded in that table, though more slowly.</a:t>
             </a:r>
           </a:p>
           <a:p>
@@ -2123,7 +2123,7 @@
             </a:r>
             <a:r>
               <a:rPr/>
-              <a:t> Adding features because they might help is good practice with a linear model: an irrelevant feature earns a coefficient near zero and costs you almost nothing. That reasoning is sound, and it is what they have been taught for three lessons. With k-NN the same feature costs you a dimension in the distance, and dimensions are what the method is made of. The habit is right; transferring it one lesson later does real damage. Say that the fix is to select features BEFORE the distance, inside the pipeline — which is last week’s rule again.</a:t>
+              <a:t> Adding features because they might help is good practice with a linear model: an irrelevant feature earns a coefficient near zero and costs you almost nothing. That reasoning is sound, and it is what they have been taught for three lessons. With k-NN the same feature costs you a dimension in the distance, and dimensions are what the method is made of. The habit is right; transferring it one lesson later does real damage. Say that the fix is to select features BEFORE the distance, inside the pipeline - which is last week’s rule again.</a:t>
             </a:r>
           </a:p>
         </p:txBody>
@@ -2233,21 +2233,21 @@
             </a:pPr>
             <a:r>
               <a:rPr/>
-              <a:t>The cell to protect if time runs short is the noise-column sweep. Let them add the columns themselves and watch the score cross the baseline — it changes behaviour in a way that reading the table does not.</a:t>
-            </a:r>
-          </a:p>
-          <a:p>
-            <a:pPr lvl="0" indent="0" marL="0">
-              <a:buNone/>
-            </a:pPr>
-          </a:p>
-          <a:p>
-            <a:pPr lvl="0" indent="0" marL="0">
-              <a:buNone/>
-            </a:pPr>
-            <a:r>
-              <a:rPr/>
-              <a:t>If somebody finishes early, the interesting extension is to ask what happens with 50 noise columns and 12,000 rows instead of 1,200. The curse is partly a sample-size problem, and more data does push it back — just far more slowly than anyone expects.</a:t>
+              <a:t>The cell to protect if time runs short is the noise-column sweep. Let them add the columns themselves and watch the score cross the baseline - it changes behaviour in a way that reading the table does not.</a:t>
+            </a:r>
+          </a:p>
+          <a:p>
+            <a:pPr lvl="0" indent="0" marL="0">
+              <a:buNone/>
+            </a:pPr>
+          </a:p>
+          <a:p>
+            <a:pPr lvl="0" indent="0" marL="0">
+              <a:buNone/>
+            </a:pPr>
+            <a:r>
+              <a:rPr/>
+              <a:t>If somebody finishes early, the interesting extension is to ask what happens with 50 noise columns and 12,000 rows instead of 1,200. The curse is partly a sample-size problem, and more data does push it back - just far more slowly than anyone expects.</a:t>
             </a:r>
           </a:p>
         </p:txBody>
@@ -2425,7 +2425,7 @@
             </a:pPr>
             <a:r>
               <a:rPr/>
-              <a:t>Walk the right-hand side once. The prior is the class frequency — a count, no difficulty. The denominator is the same number for every class, so it cannot change which class wins, and it can be dropped entirely.</a:t>
+              <a:t>Walk the right-hand side once. The prior is the class frequency - a count, no difficulty. The denominator is the same number for every class, so it cannot change which class wins, and it can be dropped entirely.</a:t>
             </a:r>
           </a:p>
           <a:p>
@@ -2453,7 +2453,7 @@
             </a:pPr>
             <a:r>
               <a:rPr/>
-              <a:t>Point out that this is the curse again, arriving from a completely different direction — density estimation rather than distance. Handout section 4.1.</a:t>
+              <a:t>Point out that this is the curse again, arriving from a completely different direction - density estimation rather than distance. Handout section 4.1.</a:t>
             </a:r>
           </a:p>
         </p:txBody>
@@ -2659,21 +2659,21 @@
             </a:pPr>
             <a:r>
               <a:rPr/>
-              <a:t>Emphasise the words “given the class”. This is not a claim that the features are independent — it is a claim that whatever dependence they have is entirely explained by which class they belong to. Those are different claims and the distinction matters in about ten minutes, when we measure it.</a:t>
-            </a:r>
-          </a:p>
-          <a:p>
-            <a:pPr lvl="0" indent="0" marL="0">
-              <a:buNone/>
-            </a:pPr>
-          </a:p>
-          <a:p>
-            <a:pPr lvl="0" indent="0" marL="0">
-              <a:buNone/>
-            </a:pPr>
-            <a:r>
-              <a:rPr/>
-              <a:t>What it buys: one n-dimensional estimation problem becomes n one-dimensional ones. A one-dimensional density needs very little data. Training becomes a single pass computing a mean and a variance per feature per class — there is no iteration, no optimisation, nothing to converge.</a:t>
+              <a:t>Emphasise the words “given the class”. This is not a claim that the features are independent - it is a claim that whatever dependence they have is entirely explained by which class they belong to. Those are different claims and the distinction matters in about ten minutes, when we measure it.</a:t>
+            </a:r>
+          </a:p>
+          <a:p>
+            <a:pPr lvl="0" indent="0" marL="0">
+              <a:buNone/>
+            </a:pPr>
+          </a:p>
+          <a:p>
+            <a:pPr lvl="0" indent="0" marL="0">
+              <a:buNone/>
+            </a:pPr>
+            <a:r>
+              <a:rPr/>
+              <a:t>What it buys: one n-dimensional estimation problem becomes n one-dimensional ones. A one-dimensional density needs very little data. Training becomes a single pass computing a mean and a variance per feature per class - there is no iteration, no optimisation, nothing to converge.</a:t>
             </a:r>
           </a:p>
           <a:p>
@@ -2783,7 +2783,7 @@
             </a:pPr>
             <a:r>
               <a:rPr/>
-              <a:t>Why that matters is a counting argument, and it is worth making concrete. To estimate the left-hand side directly you would need enough pumps to fill an n-dimensional space — the curse of dimensionality from an hour ago, arriving in a new disguise. To estimate the right-hand side you need enough pumps to fit n separate histograms, which is a completely different demand.</a:t>
+              <a:t>Why that matters is a counting argument, and it is worth making concrete. To estimate the left-hand side directly you would need enough pumps to fill an n-dimensional space - the curse of dimensionality from an hour ago, arriving in a new disguise. To estimate the right-hand side you need enough pumps to fit n separate histograms, which is a completely different demand.</a:t>
             </a:r>
           </a:p>
           <a:p>
@@ -3003,7 +3003,7 @@
             </a:pPr>
             <a:r>
               <a:rPr/>
-              <a:t>A point behind k-NN, and an enormous distance ahead of the linear model — from a method that assumes something false and trains in a single pass over the data.</a:t>
+              <a:t>A point behind k-NN, and an enormous distance ahead of the linear model - from a method that assumes something false and trains in a single pass over the data.</a:t>
             </a:r>
           </a:p>
           <a:p>
@@ -3127,7 +3127,7 @@
             </a:pPr>
             <a:r>
               <a:rPr/>
-              <a:t>Measured directly, and remember the assumption concerns independence GIVEN THE CLASS — so the second and third rows are the ones that count, not the first.</a:t>
+              <a:t>Measured directly, and remember the assumption concerns independence GIVEN THE CLASS - so the second and third rows are the ones that count, not the first.</a:t>
             </a:r>
           </a:p>
           <a:p>
@@ -3155,7 +3155,7 @@
             </a:pPr>
             <a:r>
               <a:rPr/>
-              <a:t>Say why that is more useful than the 0.933. A score tells you what happened once. Knowing WHY it happened tells you when to expect it again — and it gives them a check they can run in two lines before trusting Naive Bayes on anything.</a:t>
+              <a:t>Say why that is more useful than the 0.933. A score tells you what happened once. Knowing WHY it happened tells you when to expect it again - and it gives them a check they can run in two lines before trusting Naive Bayes on anything.</a:t>
             </a:r>
           </a:p>
           <a:p>
@@ -3287,7 +3287,7 @@
             </a:r>
             <a:r>
               <a:rPr/>
-              <a:t>, and that is the number every score today should be compared against — not against 1.000, and not against each other in isolation.</a:t>
+              <a:t>, and that is the number every score today should be compared against - not against 1.000, and not against each other in isolation.</a:t>
             </a:r>
           </a:p>
           <a:p>
@@ -3507,7 +3507,7 @@
             </a:pPr>
             <a:r>
               <a:rPr/>
-              <a:t>Left panel: the two sensors together. Four clean groups, and a perfectly learnable rule — any method that can draw a non-linear boundary will find it.</a:t>
+              <a:t>Left panel: the two sensors together. Four clean groups, and a perfectly learnable rule - any method that can draw a non-linear boundary will find it.</a:t>
             </a:r>
           </a:p>
           <a:p>
@@ -3549,7 +3549,7 @@
             </a:pPr>
             <a:r>
               <a:rPr/>
-              <a:t>Worth saying that no amount of data repairs this. It is not an estimation problem — with a million rows the marginals still overlap. The model cannot represent what is being asked of it.</a:t>
+              <a:t>Worth saying that no amount of data repairs this. It is not an estimation problem - with a million rows the marginals still overlap. The model cannot represent what is being asked of it.</a:t>
             </a:r>
           </a:p>
         </p:txBody>
@@ -3659,21 +3659,21 @@
             </a:pPr>
             <a:r>
               <a:rPr/>
-              <a:t>Second, and take the time: 0.404 is BELOW CHANCE. Below the majority baseline of 0.523, and below what you would get by flipping a coin. Ask how that is even possible — a model with no information should surely sit at 50%.</a:t>
-            </a:r>
-          </a:p>
-          <a:p>
-            <a:pPr lvl="0" indent="0" marL="0">
-              <a:buNone/>
-            </a:pPr>
-          </a:p>
-          <a:p>
-            <a:pPr lvl="0" indent="0" marL="0">
-              <a:buNone/>
-            </a:pPr>
-            <a:r>
-              <a:rPr/>
-              <a:t>The explanation is worth having in full. The class means on each sensor differ by about 0.17, against a spread near 1, purely as an artefact of a finite sample. That accident is the ONLY per-feature evidence available. Naive Bayes has nothing else to multiply, so it follows it — and in this sample it points the wrong way.</a:t>
+              <a:t>Second, and take the time: 0.404 is BELOW CHANCE. Below the majority baseline of 0.523, and below what you would get by flipping a coin. Ask how that is even possible - a model with no information should surely sit at 50%.</a:t>
+            </a:r>
+          </a:p>
+          <a:p>
+            <a:pPr lvl="0" indent="0" marL="0">
+              <a:buNone/>
+            </a:pPr>
+          </a:p>
+          <a:p>
+            <a:pPr lvl="0" indent="0" marL="0">
+              <a:buNone/>
+            </a:pPr>
+            <a:r>
+              <a:rPr/>
+              <a:t>The explanation is worth having in full. The class means on each sensor differ by about 0.17, against a spread near 1, purely as an artefact of a finite sample. That accident is the ONLY per-feature evidence available. Naive Bayes has nothing else to multiply, so it follows it - and in this sample it points the wrong way.</a:t>
             </a:r>
           </a:p>
           <a:p>
@@ -3821,7 +3821,7 @@
             </a:pPr>
             <a:r>
               <a:rPr/>
-              <a:t>The practical consequence, and it is concrete: do not use Naive Bayes anywhere a calibrated probability enters a decision — including lesson 4’s cost calculation in section 7.2, where the threshold depends on the probability being real.</a:t>
+              <a:t>The practical consequence, and it is concrete: do not use Naive Bayes anywhere a calibrated probability enters a decision - including lesson 4’s cost calculation in section 7.2, where the threshold depends on the probability being real.</a:t>
             </a:r>
           </a:p>
         </p:txBody>
@@ -4041,21 +4041,21 @@
             </a:pPr>
             <a:r>
               <a:rPr/>
-              <a:t>So the error cannot decide. Something else has to. Logistic regression breaks the tie with log loss — a perfectly respectable answer, and one answer among several. The SVM breaks it differently: take the boundary with the most room around it.</a:t>
-            </a:r>
-          </a:p>
-          <a:p>
-            <a:pPr lvl="0" indent="0" marL="0">
-              <a:buNone/>
-            </a:pPr>
-          </a:p>
-          <a:p>
-            <a:pPr lvl="0" indent="0" marL="0">
-              <a:buNone/>
-            </a:pPr>
-            <a:r>
-              <a:rPr/>
-              <a:t>The intuition, and this is the sentence to say slowly: maximising the distance to the closest points chooses the boundary that tolerates the most movement in the data before it changes its mind. That is a statement about GENERALISATION, not about fit — which is unusual, because almost everything else in this course optimises fit and controls generalisation indirectly.</a:t>
+              <a:t>So the error cannot decide. Something else has to. Logistic regression breaks the tie with log loss - a perfectly respectable answer, and one answer among several. The SVM breaks it differently: take the boundary with the most room around it.</a:t>
+            </a:r>
+          </a:p>
+          <a:p>
+            <a:pPr lvl="0" indent="0" marL="0">
+              <a:buNone/>
+            </a:pPr>
+          </a:p>
+          <a:p>
+            <a:pPr lvl="0" indent="0" marL="0">
+              <a:buNone/>
+            </a:pPr>
+            <a:r>
+              <a:rPr/>
+              <a:t>The intuition, and this is the sentence to say slowly: maximising the distance to the closest points chooses the boundary that tolerates the most movement in the data before it changes its mind. That is a statement about GENERALISATION, not about fit - which is unusual, because almost everything else in this course optimises fit and controls generalisation indirectly.</a:t>
             </a:r>
           </a:p>
           <a:p>
@@ -4165,7 +4165,7 @@
             </a:pPr>
             <a:r>
               <a:rPr/>
-              <a:t>The number to say out loud: of eighty points, THREE determine the answer. Move any of the other seventy-seven — anywhere, as far as you like, as long as they stay outside the slab — and the boundary does not shift by a millimetre.</a:t>
+              <a:t>The number to say out loud: of eighty points, THREE determine the answer. Move any of the other seventy-seven - anywhere, as far as you like, as long as they stay outside the slab - and the boundary does not shift by a millimetre.</a:t>
             </a:r>
           </a:p>
           <a:p>
@@ -4193,7 +4193,7 @@
             </a:pPr>
             <a:r>
               <a:rPr/>
-              <a:t>Two consequences worth naming. The model is small — you store the support vectors, not the dataset, which is the contrast with k-NN. And it is sensitive in a specific way: an outlier near the boundary matters enormously, while an outlier far from it matters not at all.</a:t>
+              <a:t>Two consequences worth naming. The model is small - you store the support vectors, not the dataset, which is the contrast with k-NN. And it is sensitive in a specific way: an outlier near the boundary matters enormously, while an outlier far from it matters not at all.</a:t>
             </a:r>
           </a:p>
         </p:txBody>
@@ -4275,7 +4275,7 @@
             </a:pPr>
             <a:r>
               <a:rPr/>
-              <a:t>Do not derive this. State what each piece is doing and move on — handout section 5.2 has the derivation, including why maximising the margin is the same as minimising the norm of w.</a:t>
+              <a:t>Do not derive this. State what each piece is doing and move on - handout section 5.2 has the derivation, including why maximising the margin is the same as minimising the norm of w.</a:t>
             </a:r>
           </a:p>
           <a:p>
@@ -4303,7 +4303,7 @@
             </a:pPr>
             <a:r>
               <a:rPr/>
-              <a:t>The point worth stressing is why the soft margin is not a patch or a convenience. With even one mislabelled point inside the other class, the strict problem is INFEASIBLE — there is no solution, not a bad one. Real data always contains such points. So the soft margin is the only version anyone ever runs; the hard-margin problem is a teaching device.</a:t>
+              <a:t>The point worth stressing is why the soft margin is not a patch or a convenience. With even one mislabelled point inside the other class, the strict problem is INFEASIBLE - there is no solution, not a bad one. Real data always contains such points. So the soft margin is the only version anyone ever runs; the hard-margin problem is a teaching device.</a:t>
             </a:r>
           </a:p>
           <a:p>
@@ -4399,7 +4399,7 @@
             </a:pPr>
             <a:r>
               <a:rPr/>
-              <a:t>Third appearance of the same idea, and say so — that repetition is the point. Lesson 3 had λ, this morning had k, now C. Every model has one knob that trades fitting this data against surviving the next, and recognising it in an unfamiliar model is worth more than memorising three names.</a:t>
+              <a:t>Third appearance of the same idea, and say so - that repetition is the point. Lesson 3 had λ, this morning had k, now C. Every model has one knob that trades fitting this data against surviving the next, and recognising it in an unfamiliar model is worth more than memorising three names.</a:t>
             </a:r>
           </a:p>
           <a:p>
@@ -4433,7 +4433,7 @@
             </a:r>
             <a:r>
               <a:rPr/>
-              <a:t> has the same inverted convention — it is the reciprocal of the penalty there too.</a:t>
+              <a:t> has the same inverted convention - it is the reciprocal of the penalty there too.</a:t>
             </a:r>
           </a:p>
           <a:p>
@@ -4529,7 +4529,7 @@
             </a:pPr>
             <a:r>
               <a:rPr/>
-              <a:t>The linear kernel scores 0.613 — the base rate, exactly as logistic regression did this morning, with the same zero variance across folds.</a:t>
+              <a:t>The linear kernel scores 0.613 - the base rate, exactly as logistic regression did this morning, with the same zero variance across folds.</a:t>
             </a:r>
           </a:p>
           <a:p>
@@ -4557,7 +4557,7 @@
             </a:pPr>
             <a:r>
               <a:rPr/>
-              <a:t>Then the RBF row, which is the same algorithm with one argument changed, at 0.947 — the best number in the whole lesson, and within a hair of the 0.96 ceiling.</a:t>
+              <a:t>Then the RBF row, which is the same algorithm with one argument changed, at 0.947 - the best number in the whole lesson, and within a hair of the 0.96 ceiling.</a:t>
             </a:r>
           </a:p>
           <a:p>
@@ -4667,7 +4667,7 @@
             </a:pPr>
             <a:r>
               <a:rPr/>
-              <a:t>The healthy pumps form a disc around the design point; the faulty ones form the annulus around them. There is no line. Not a badly chosen line — no line at all, because the class you want to isolate is completely surrounded.</a:t>
+              <a:t>The healthy pumps form a disc around the design point; the faulty ones form the annulus around them. There is no line. Not a badly chosen line - no line at all, because the class you want to isolate is completely surrounded.</a:t>
             </a:r>
           </a:p>
           <a:p>
@@ -4695,7 +4695,7 @@
             </a:pPr>
             <a:r>
               <a:rPr/>
-              <a:t>The scattered wrong-coloured points inside each region are the 4% flipped labels. Point at two of them now — they come back at k = 1.</a:t>
+              <a:t>The scattered wrong-coloured points inside each region are the 4% flipped labels. Point at two of them now - they come back at k = 1.</a:t>
             </a:r>
           </a:p>
         </p:txBody>
@@ -4777,7 +4777,7 @@
             </a:pPr>
             <a:r>
               <a:rPr/>
-              <a:t>Explain what 79% actually means geometrically. A support vector is a point on the margin or inside it. If 79% of your data is in that position, there is no region of empty space between the classes at all — the model has been forced to place a boundary through a crowd.</a:t>
+              <a:t>Explain what 79% actually means geometrically. A support vector is a point on the margin or inside it. If 79% of your data is in that position, there is no region of empty space between the classes at all - the model has been forced to place a boundary through a crowd.</a:t>
             </a:r>
           </a:p>
           <a:p>
@@ -4829,7 +4829,7 @@
             </a:pPr>
             <a:r>
               <a:rPr/>
-              <a:t>Worth adding that it also predicts prediction cost — every support vector is one kernel evaluation per query, so a model needing 79% of the data has thrown away most of the speed advantage over k-NN.</a:t>
+              <a:t>Worth adding that it also predicts prediction cost - every support vector is one kernel evaluation per query, so a model needing 79% of the data has thrown away most of the speed advantage over k-NN.</a:t>
             </a:r>
           </a:p>
         </p:txBody>
@@ -4925,21 +4925,21 @@
             </a:pPr>
             <a:r>
               <a:rPr/>
-              <a:t>Then the sentence that reframes the whole afternoon: the classes were never inseparable. Separability is not a property of the data — it is a property of the data AND the coordinates you happen to have measured it in.</a:t>
-            </a:r>
-          </a:p>
-          <a:p>
-            <a:pPr lvl="0" indent="0" marL="0">
-              <a:buNone/>
-            </a:pPr>
-          </a:p>
-          <a:p>
-            <a:pPr lvl="0" indent="0" marL="0">
-              <a:buNone/>
-            </a:pPr>
-            <a:r>
-              <a:rPr/>
-              <a:t>Ask what is unsatisfying about what we just did, and wait for it. We chose that lift by already knowing the answer. We knew the fault mode was radial. In any real problem you do not, and inventing the right coordinate is the hard part — which is exactly the difficulty the kernel trick removes.</a:t>
+              <a:t>Then the sentence that reframes the whole afternoon: the classes were never inseparable. Separability is not a property of the data - it is a property of the data AND the coordinates you happen to have measured it in.</a:t>
+            </a:r>
+          </a:p>
+          <a:p>
+            <a:pPr lvl="0" indent="0" marL="0">
+              <a:buNone/>
+            </a:pPr>
+          </a:p>
+          <a:p>
+            <a:pPr lvl="0" indent="0" marL="0">
+              <a:buNone/>
+            </a:pPr>
+            <a:r>
+              <a:rPr/>
+              <a:t>Ask what is unsatisfying about what we just did, and wait for it. We chose that lift by already knowing the answer. We knew the fault mode was radial. In any real problem you do not, and inventing the right coordinate is the hard part - which is exactly the difficulty the kernel trick removes.</a:t>
             </a:r>
           </a:p>
           <a:p>
@@ -5049,21 +5049,21 @@
             </a:pPr>
             <a:r>
               <a:rPr/>
-              <a:t>Have them look at the right panel and confirm for themselves that a flat horizontal cut separates the colours cleanly. Nothing was added — no new measurement, no extra sensor. The third coordinate is computed from the two they already had.</a:t>
-            </a:r>
-          </a:p>
-          <a:p>
-            <a:pPr lvl="0" indent="0" marL="0">
-              <a:buNone/>
-            </a:pPr>
-          </a:p>
-          <a:p>
-            <a:pPr lvl="0" indent="0" marL="0">
-              <a:buNone/>
-            </a:pPr>
-            <a:r>
-              <a:rPr/>
-              <a:t>Then set up the objection that the next slide answers. This worked because the lift was three-dimensional and we could guess it. The spaces that work in general are enormous — the useful ones are sometimes infinite-dimensional — and computing the coordinates of every point in such a space is impossible.</a:t>
+              <a:t>Have them look at the right panel and confirm for themselves that a flat horizontal cut separates the colours cleanly. Nothing was added - no new measurement, no extra sensor. The third coordinate is computed from the two they already had.</a:t>
+            </a:r>
+          </a:p>
+          <a:p>
+            <a:pPr lvl="0" indent="0" marL="0">
+              <a:buNone/>
+            </a:pPr>
+          </a:p>
+          <a:p>
+            <a:pPr lvl="0" indent="0" marL="0">
+              <a:buNone/>
+            </a:pPr>
+            <a:r>
+              <a:rPr/>
+              <a:t>Then set up the objection that the next slide answers. This worked because the lift was three-dimensional and we could guess it. The spaces that work in general are enormous - the useful ones are sometimes infinite-dimensional - and computing the coordinates of every point in such a space is impossible.</a:t>
             </a:r>
           </a:p>
         </p:txBody>
@@ -5159,7 +5159,7 @@
             </a:pPr>
             <a:r>
               <a:rPr/>
-              <a:t>Do not prove it — handout section 5.4 shows where the inner products come from in the dual formulation. The claim to state and let land is that a function of two ordinary two-dimensional vectors returns their inner product in a space of infinite dimension, at the cost of one exponential.</a:t>
+              <a:t>Do not prove it - handout section 5.4 shows where the inner products come from in the dual formulation. The claim to state and let land is that a function of two ordinary two-dimensional vectors returns their inner product in a space of infinite dimension, at the cost of one exponential.</a:t>
             </a:r>
           </a:p>
           <a:p>
@@ -5279,21 +5279,21 @@
             </a:pPr>
             <a:r>
               <a:rPr/>
-              <a:t>Read it aloud as a similarity rather than as a formula: the closer two points are, the nearer the exponent is to zero and the nearer the kernel is to one; far apart, it falls away to nothing. That is all an RBF kernel says — how much does this point look like that one.</a:t>
-            </a:r>
-          </a:p>
-          <a:p>
-            <a:pPr lvl="0" indent="0" marL="0">
-              <a:buNone/>
-            </a:pPr>
-          </a:p>
-          <a:p>
-            <a:pPr lvl="0" indent="0" marL="0">
-              <a:buNone/>
-            </a:pPr>
-            <a:r>
-              <a:rPr/>
-              <a:t>Now say what γ means, because the next two slides turn on it: it sets how far a single training point’s influence reaches. Small γ, wide reach, smooth boundary. Large γ, each point influences only its immediate neighbourhood — and a boundary that can afford an island around every mislabelled pump.</a:t>
+              <a:t>Read it aloud as a similarity rather than as a formula: the closer two points are, the nearer the exponent is to zero and the nearer the kernel is to one; far apart, it falls away to nothing. That is all an RBF kernel says - how much does this point look like that one.</a:t>
+            </a:r>
+          </a:p>
+          <a:p>
+            <a:pPr lvl="0" indent="0" marL="0">
+              <a:buNone/>
+            </a:pPr>
+          </a:p>
+          <a:p>
+            <a:pPr lvl="0" indent="0" marL="0">
+              <a:buNone/>
+            </a:pPr>
+            <a:r>
+              <a:rPr/>
+              <a:t>Now say what γ means, because the next two slides turn on it: it sets how far a single training point’s influence reaches. Small γ, wide reach, smooth boundary. Large γ, each point influences only its immediate neighbourhood - and a boundary that can afford an island around every mislabelled pump.</a:t>
             </a:r>
           </a:p>
           <a:p>
@@ -5403,7 +5403,7 @@
             </a:pPr>
             <a:r>
               <a:rPr/>
-              <a:t>The bottom row has the best training score on the slide — 0.995, nearly perfect — and the worst honest one. That is the signature of overfitting, and here it is not inferred from theory but measured on the same data by two different procedures.</a:t>
+              <a:t>The bottom row has the best training score on the slide - 0.995, nearly perfect - and the worst honest one. That is the signature of overfitting, and here it is not inferred from theory but measured on the same data by two different procedures.</a:t>
             </a:r>
           </a:p>
           <a:p>
@@ -5435,7 +5435,7 @@
             </a:pPr>
             <a:r>
               <a:rPr/>
-              <a:t>The reason this table is on the slide rather than in the handout is that the next slide shows the same three settings as pictures — so the failure is visible as well as measurable, which is rare.</a:t>
+              <a:t>The reason this table is on the slide rather than in the handout is that the next slide shows the same three settings as pictures - so the failure is visible as well as measurable, which is rare.</a:t>
             </a:r>
           </a:p>
         </p:txBody>
@@ -5545,7 +5545,7 @@
             </a:pPr>
             <a:r>
               <a:rPr/>
-              <a:t>Right is the one to sit on. The boundary has broken into bubbles — small islands around individual points, including the mislabelled ones. That is what a 0.995 training score looks like from the outside: the model has drawn a private territory around each flipped label so that it can get it right.</a:t>
+              <a:t>Right is the one to sit on. The boundary has broken into bubbles - small islands around individual points, including the mislabelled ones. That is what a 0.995 training score looks like from the outside: the model has drawn a private territory around each flipped label so that it can get it right.</a:t>
             </a:r>
           </a:p>
           <a:p>
@@ -5669,7 +5669,7 @@
             </a:pPr>
             <a:r>
               <a:rPr/>
-              <a:t>The cell to protect is the γ sweep with the boundary drawn at each setting. Let them turn γ up themselves and watch the bubbles form — it is the most direct experience of overfitting available in this course.</a:t>
+              <a:t>The cell to protect is the γ sweep with the boundary drawn at each setting. Let them turn γ up themselves and watch the bubbles form - it is the most direct experience of overfitting available in this course.</a:t>
             </a:r>
           </a:p>
           <a:p>
@@ -5793,7 +5793,7 @@
             </a:pPr>
             <a:r>
               <a:rPr/>
-              <a:t>Read the top three rows together: all exactly 0.613, and all three are linear. Then the bottom three, all near the ceiling, reached by three completely unrelated routes — remembering the neighbourhood, assuming independence, bending the space. There is no single idea shared between them.</a:t>
+              <a:t>Read the top three rows together: all exactly 0.613, and all three are linear. Then the bottom three, all near the ceiling, reached by three completely unrelated routes - remembering the neighbourhood, assuming independence, bending the space. There is no single idea shared between them.</a:t>
             </a:r>
           </a:p>
           <a:p>
@@ -5815,7 +5815,7 @@
             </a:r>
             <a:r>
               <a:rPr/>
-              <a:t>. Larger than any difference this course has shown between a good model and a carefully tuned one — lesson 5’s entire hyperparameter search moved things by a few hundredths.</a:t>
+              <a:t>. Larger than any difference this course has shown between a good model and a carefully tuned one - lesson 5’s entire hyperparameter search moved things by a few hundredths.</a:t>
             </a:r>
           </a:p>
           <a:p>
@@ -5925,7 +5925,7 @@
             </a:pPr>
             <a:r>
               <a:rPr/>
-              <a:t>Row two deserves a sentence on its own, because it is the one that sounds wrong after the last hour. Text classification is the canonical case: tens of thousands of word-count features, an assumption that is transparently false, and a method that works anyway — because being roughly right in ten thousand dimensions beats being unable to estimate anything at all. Also mention Naive Bayes as a baseline: it trains in one pass, so if your tuned model does not beat it you have learned something quickly and cheaply.</a:t>
+              <a:t>Row two deserves a sentence on its own, because it is the one that sounds wrong after the last hour. Text classification is the canonical case: tens of thousands of word-count features, an assumption that is transparently false, and a method that works anyway - because being roughly right in ten thousand dimensions beats being unable to estimate anything at all. Also mention Naive Bayes as a baseline: it trains in one pass, so if your tuned model does not beat it you have learned something quickly and cheaply.</a:t>
             </a:r>
           </a:p>
           <a:p>
@@ -6057,7 +6057,7 @@
             </a:r>
             <a:r>
               <a:rPr/>
-              <a:t>. A model that gives everything the same answer is perfectly consistent across folds. Give them that as a diagnostic to keep — a suspiciously stable cross-validation score often means a model that is not using its input.</a:t>
+              <a:t>. A model that gives everything the same answer is perfectly consistent across folds. Give them that as a diagnostic to keep - a suspiciously stable cross-validation score often means a model that is not using its input.</a:t>
             </a:r>
           </a:p>
           <a:p>
@@ -6291,7 +6291,7 @@
             </a:pPr>
             <a:r>
               <a:rPr/>
-              <a:t>The marks are for the reasoning, not for the accuracy. A well-argued choice that scores slightly worse beats a lucky winner with no justification — and the argument has to reference the data, in the way that the −0.006 justified Naive Bayes on the pumps this afternoon.</a:t>
+              <a:t>The marks are for the reasoning, not for the accuracy. A well-argued choice that scores slightly worse beats a lucky winner with no justification - and the argument has to reference the data, in the way that the −0.006 justified Naive Bayes on the pumps this afternoon.</a:t>
             </a:r>
           </a:p>
           <a:p>
@@ -6319,7 +6319,7 @@
             </a:pPr>
             <a:r>
               <a:rPr/>
-              <a:t>Next week: decision trees and ensembles. A fourth family, with a different answer again to the same question — how do you draw a boundary that is not a line.</a:t>
+              <a:t>Next week: decision trees and ensembles. A fourth family, with a different answer again to the same question - how do you draw a boundary that is not a line.</a:t>
             </a:r>
           </a:p>
         </p:txBody>
@@ -6429,7 +6429,7 @@
             </a:pPr>
             <a:r>
               <a:rPr/>
-              <a:t>Two decisions hide inside that sentence — what “closest” means, and what k is — and both are consequential. Take them in that order.</a:t>
+              <a:t>Two decisions hide inside that sentence - what “closest” means, and what k is - and both are consequential. Take them in that order.</a:t>
             </a:r>
           </a:p>
           <a:p>
@@ -6539,7 +6539,7 @@
             </a:pPr>
             <a:r>
               <a:rPr/>
-              <a:t>The observation that matters: every feature contributes to that sum through its own units. There is nothing in the expression that knows Hz from bar. The method has no other channel through which the data reaches it — no coefficients, no weights, no notion that one column might matter more than another.</a:t>
+              <a:t>The observation that matters: every feature contributes to that sum through its own units. There is nothing in the expression that knows Hz from bar. The method has no other channel through which the data reaches it - no coefficients, no weights, no notion that one column might matter more than another.</a:t>
             </a:r>
           </a:p>
           <a:p>
@@ -6663,7 +6663,7 @@
             </a:pPr>
             <a:r>
               <a:rPr/>
-              <a:t>Work the arithmetic out loud. Two pumps differing by 10 Hz and 0 bar are 10 apart. Two differing by 0 Hz and 1 bar are 1 apart. So the algorithm considers the second pair ten times more similar — for no reason other than the units somebody chose when the sensors were installed.</a:t>
+              <a:t>Work the arithmetic out loud. Two pumps differing by 10 Hz and 0 bar are 10 apart. Two differing by 0 Hz and 1 bar are 1 apart. So the algorithm considers the second pair ten times more similar - for no reason other than the units somebody chose when the sensors were installed.</a:t>
             </a:r>
           </a:p>
           <a:p>
@@ -6691,7 +6691,7 @@
             </a:pPr>
             <a:r>
               <a:rPr/>
-              <a:t>Practical instruction: k-NN goes in a Pipeline with StandardScaler, always, and the scaler is fitted inside the fold — which is last week’s lesson, not a new one.</a:t>
+              <a:t>Practical instruction: k-NN goes in a Pipeline with StandardScaler, always, and the scaler is fitted inside the fold - which is last week’s lesson, not a new one.</a:t>
             </a:r>
           </a:p>
         </p:txBody>
@@ -6801,7 +6801,7 @@
             </a:pPr>
             <a:r>
               <a:rPr/>
-              <a:t>That is the purest illustration in the whole course of lesson 5’s point: a training score can be perfect and measure absolutely nothing. Not approximately nothing — nothing, by construction, independent of the data.</a:t>
+              <a:t>That is the purest illustration in the whole course of lesson 5’s point: a training score can be perfect and measure absolutely nothing. Not approximately nothing - nothing, by construction, independent of the data.</a:t>
             </a:r>
           </a:p>
           <a:p>
@@ -9888,7 +9888,7 @@
             </a:pPr>
             <a:r>
               <a:rPr/>
-              <a:t>Lesson 6 — k-NN, Naive Bayes and Support Vector Machines</a:t>
+              <a:t>Lesson 6: k-NN, Naive Bayes and Support Vector Machines</a:t>
             </a:r>
           </a:p>
         </p:txBody>
@@ -9924,7 +9924,7 @@
             <a:br/>
             <a:r>
               <a:rPr/>
-              <a:t>Fabio Antonini — Università degli Studi dell’Aquila</a:t>
+              <a:t>Fabio Antonini, Università degli Studi dell’Aquila</a:t>
             </a:r>
           </a:p>
         </p:txBody>
@@ -10038,7 +10038,7 @@
             </a:r>
             <a:r>
               <a:rPr/>
-              <a:t> — the boundary follows every point, mislabelled ones included. Low bias, high variance</a:t>
+              <a:t>: the boundary follows every point, mislabelled ones included. Low bias, high variance</a:t>
             </a:r>
           </a:p>
           <a:p>
@@ -10049,7 +10049,7 @@
             </a:r>
             <a:r>
               <a:rPr/>
-              <a:t> — the vote is taken over a wide neighbourhood, and eventually stops following real structure. High bias, low variance</a:t>
+              <a:t>: the vote is taken over a wide neighbourhood, and eventually stops following real structure. High bias, low variance</a:t>
             </a:r>
           </a:p>
           <a:p>
@@ -10674,7 +10674,7 @@
             <a:pPr lvl="0"/>
             <a:r>
               <a:rPr/>
-              <a:t>No training time at all — you pay at </a:t>
+              <a:t>No training time at all: you pay at </a:t>
             </a:r>
             <a:r>
               <a:rPr b="1"/>
@@ -10821,7 +10821,7 @@
             </a:r>
             <a:r>
               <a:rPr/>
-              <a:t> — the problem is exactly as solvable</a:t>
+              <a:t>: the problem is exactly as solvable</a:t>
             </a:r>
           </a:p>
           <a:p>
@@ -11297,7 +11297,7 @@
             <a:pPr lvl="0"/>
             <a:r>
               <a:rPr/>
-              <a:t>In two dimensions those are very different numbers — which is what makes “nearest” a meaningful word</a:t>
+              <a:t>In two dimensions those are very different numbers, which is what makes “nearest” a meaningful word</a:t>
             </a:r>
           </a:p>
           <a:p>
@@ -11751,7 +11751,7 @@
             <a:pPr lvl="0"/>
             <a:r>
               <a:rPr/>
-              <a:t>The score that was too good — and what the honest number cost you</a:t>
+              <a:t>The score that was too good, and what the honest number cost you</a:t>
             </a:r>
           </a:p>
         </p:txBody>
@@ -11847,7 +11847,7 @@
             </a:r>
             <a:r>
               <a:rPr/>
-              <a:t> — “nearest” picks out something special</a:t>
+              <a:t>: “nearest” picks out something special</a:t>
             </a:r>
           </a:p>
           <a:p>
@@ -11870,7 +11870,7 @@
             </a:r>
             <a:r>
               <a:rPr/>
-              <a:t> — the nearest point is barely nearer than a random one</a:t>
+              <a:t>: the nearest point is barely nearer than a random one</a:t>
             </a:r>
           </a:p>
           <a:p>
@@ -11961,7 +11961,7 @@
             </a:r>
             <a:r>
               <a:rPr/>
-              <a:t> that high-dimensional problems are unlearnable — lesson 9’s networks work in thousands of dimensions</a:t>
+              <a:t> that high-dimensional problems are unlearnable: lesson 9’s networks work in thousands of dimensions</a:t>
             </a:r>
           </a:p>
           <a:p>
@@ -11983,7 +11983,7 @@
             <a:pPr lvl="0"/>
             <a:r>
               <a:rPr/>
-              <a:t>k-NN, k-means (lesson 8), and radial basis function (RBF) kernels — all of them</a:t>
+              <a:t>k-NN, k-means (lesson 8), and radial basis function (RBF) kernels, all of them</a:t>
             </a:r>
           </a:p>
         </p:txBody>
@@ -12620,7 +12620,7 @@
             <a:pPr lvl="0"/>
             <a:r>
               <a:rPr/>
-              <a:t>So the question is not whether it holds — it is </a:t>
+              <a:t>So the question is not whether it holds: it is </a:t>
             </a:r>
             <a:r>
               <a:rPr b="1"/>
@@ -12950,7 +12950,7 @@
             </a:r>
             <a:r>
               <a:rPr/>
-              <a:t> — remember, and vote</a:t>
+              <a:t>: remember, and vote</a:t>
             </a:r>
           </a:p>
           <a:p>
@@ -12976,7 +12976,7 @@
             </a:r>
             <a:r>
               <a:rPr/>
-              <a:t> — one strong assumption, bought cheap</a:t>
+              <a:t>: one strong assumption, bought cheap</a:t>
             </a:r>
           </a:p>
           <a:p>
@@ -12987,7 +12987,7 @@
             </a:r>
             <a:r>
               <a:rPr/>
-              <a:t> — margins, and kernels</a:t>
+              <a:t>: margins, and kernels</a:t>
             </a:r>
           </a:p>
           <a:p>
@@ -13440,7 +13440,7 @@
             </a:pPr>
             <a:r>
               <a:rPr/>
-              <a:t>0.404 — below the baseline, and below chance</a:t>
+              <a:t>0.404: below the baseline, and below chance</a:t>
             </a:r>
           </a:p>
         </p:txBody>
@@ -13800,7 +13800,7 @@
             <a:pPr lvl="0"/>
             <a:r>
               <a:rPr/>
-              <a:t>With correlated features it fails the other way — 0.999 reported, with an accuracy nothing like that</a:t>
+              <a:t>With correlated features it fails the other way: 0.999 reported, with an accuracy nothing like that</a:t>
             </a:r>
           </a:p>
           <a:p>
@@ -14302,7 +14302,7 @@
             </a:r>
             <a:r>
               <a:rPr/>
-              <a:t> — violations are expensive, so the model contorts to classify everything. Narrow margin, low bias, high variance</a:t>
+              <a:t>: violations are expensive, so the model contorts to classify everything. Narrow margin, low bias, high variance</a:t>
             </a:r>
           </a:p>
           <a:p>
@@ -14313,7 +14313,7 @@
             </a:r>
             <a:r>
               <a:rPr/>
-              <a:t> — a wider, calmer boundary, at the cost of some errors</a:t>
+              <a:t>: a wider, calmer boundary, at the cost of some errors</a:t>
             </a:r>
           </a:p>
           <a:p>
@@ -14426,7 +14426,7 @@
             </a:r>
             <a:r>
               <a:rPr/>
-              <a:t> — too low as readily as too high</a:t>
+              <a:t>, too low as readily as too high</a:t>
             </a:r>
           </a:p>
           <a:p>
@@ -14776,7 +14776,7 @@
             <a:pPr lvl="0"/>
             <a:r>
               <a:rPr/>
-              <a:t>Almost every point sits on or inside the margin — there is no slab that separates anything</a:t>
+              <a:t>Almost every point sits on or inside the margin: there is no slab that separates anything</a:t>
             </a:r>
           </a:p>
           <a:p>
@@ -14873,7 +14873,7 @@
             <a:pPr lvl="0"/>
             <a:r>
               <a:rPr/>
-              <a:t>Healthy pumps in a disc, faulty ones around it — no line works </a:t>
+              <a:t>Healthy pumps in a disc, faulty ones around it: no line works </a:t>
             </a:r>
             <a:r>
               <a:rPr b="1"/>
@@ -16835,7 +16835,7 @@
             </a:r>
             <a:r>
               <a:rPr/>
-              <a:t> — an unusually honest name for an algorithm</a:t>
+              <a:t>: an unusually honest name for an algorithm</a:t>
             </a:r>
           </a:p>
         </p:txBody>

--- a/Lessons/06_knn_naive_bayes_svm/Slides/knn_naive_bayes_svm_slides.pptx
+++ b/Lessons/06_knn_naive_bayes_svm/Slides/knn_naive_bayes_svm_slides.pptx
@@ -5,7 +5,7 @@
     <p:sldMasterId id="2147483648" r:id="rId1"/>
   </p:sldMasterIdLst>
   <p:notesMasterIdLst>
-    <p:notesMasterId r:id="rId54"/>
+    <p:notesMasterId r:id="rId55"/>
   </p:notesMasterIdLst>
   <p:sldIdLst>
     <p:sldId id="256" r:id="rId2"/>
@@ -60,6 +60,7 @@
     <p:sldId id="305" r:id="rId51"/>
     <p:sldId id="306" r:id="rId52"/>
     <p:sldId id="307" r:id="rId53"/>
+    <p:sldId id="308" r:id="rId54"/>
   </p:sldIdLst>
   <p:sldSz cx="9144000" cy="5143500" type="screen16x9"/>
   <p:notesSz cx="6858000" cy="9144000"/>
@@ -4275,34 +4276,6 @@
             </a:pPr>
             <a:r>
               <a:rPr/>
-              <a:t>Do not derive this. State what each piece is doing and move on - handout section 5.2 has the derivation, including why maximising the margin is the same as minimising the norm of w.</a:t>
-            </a:r>
-          </a:p>
-          <a:p>
-            <a:pPr lvl="0" indent="0" marL="0">
-              <a:buNone/>
-            </a:pPr>
-          </a:p>
-          <a:p>
-            <a:pPr lvl="0" indent="0" marL="0">
-              <a:buNone/>
-            </a:pPr>
-            <a:r>
-              <a:rPr/>
-              <a:t>The first term wants a wide slab. The second term wants few violations. C sets the exchange rate between them, and that is the entire content of the expression.</a:t>
-            </a:r>
-          </a:p>
-          <a:p>
-            <a:pPr lvl="0" indent="0" marL="0">
-              <a:buNone/>
-            </a:pPr>
-          </a:p>
-          <a:p>
-            <a:pPr lvl="0" indent="0" marL="0">
-              <a:buNone/>
-            </a:pPr>
-            <a:r>
-              <a:rPr/>
               <a:t>The point worth stressing is why the soft margin is not a patch or a convenience. With even one mislabelled point inside the other class, the strict problem is INFEASIBLE - there is no solution, not a bad one. Real data always contains such points. So the soft margin is the only version anyone ever runs; the hard-margin problem is a teaching device.</a:t>
             </a:r>
           </a:p>
@@ -4317,7 +4290,21 @@
             </a:pPr>
             <a:r>
               <a:rPr/>
-              <a:t>If someone asks about the half in front of the norm: it is there to make the derivative tidy, exactly as in lesson 3’s cost function.</a:t>
+              <a:t>Our own labels are flipped at 4%, deliberately, so this is not a hypothetical for this dataset: the hard-margin problem on these pumps has no answer.</a:t>
+            </a:r>
+          </a:p>
+          <a:p>
+            <a:pPr lvl="0" indent="0" marL="0">
+              <a:buNone/>
+            </a:pPr>
+          </a:p>
+          <a:p>
+            <a:pPr lvl="0" indent="0" marL="0">
+              <a:buNone/>
+            </a:pPr>
+            <a:r>
+              <a:rPr/>
+              <a:t>The next slide puts it in symbols. Handout section 5.2 has the derivation.</a:t>
             </a:r>
           </a:p>
         </p:txBody>
@@ -4399,55 +4386,35 @@
             </a:pPr>
             <a:r>
               <a:rPr/>
-              <a:t>Third appearance of the same idea, and say so - that repetition is the point. Lesson 3 had λ, this morning had k, now C. Every model has one knob that trades fitting this data against surviving the next, and recognising it in an unfamiliar model is worth more than memorising three names.</a:t>
-            </a:r>
-          </a:p>
-          <a:p>
-            <a:pPr lvl="0" indent="0" marL="0">
-              <a:buNone/>
-            </a:pPr>
-          </a:p>
-          <a:p>
-            <a:pPr lvl="0" indent="0" marL="0">
-              <a:buNone/>
-            </a:pPr>
-            <a:r>
-              <a:rPr/>
-              <a:t>Then the direction, which catches people out constantly and is worth writing on the board. Large λ means MORE regularisation. Large C means LESS. They run opposite ways, and scikit-learn’s </a:t>
-            </a:r>
-            <a:r>
-              <a:rPr>
-                <a:latin typeface="Courier"/>
-              </a:rPr>
-              <a:t>C</a:t>
-            </a:r>
-            <a:r>
-              <a:rPr/>
-              <a:t> parameter in </a:t>
-            </a:r>
-            <a:r>
-              <a:rPr>
-                <a:latin typeface="Courier"/>
-              </a:rPr>
-              <a:t>LogisticRegression</a:t>
-            </a:r>
-            <a:r>
-              <a:rPr/>
-              <a:t> has the same inverted convention - it is the reciprocal of the penalty there too.</a:t>
-            </a:r>
-          </a:p>
-          <a:p>
-            <a:pPr lvl="0" indent="0" marL="0">
-              <a:buNone/>
-            </a:pPr>
-          </a:p>
-          <a:p>
-            <a:pPr lvl="0" indent="0" marL="0">
-              <a:buNone/>
-            </a:pPr>
-            <a:r>
-              <a:rPr/>
-              <a:t>Ask them which way they would expect C to run before you tell them. Most guess wrong, and having guessed wrong once is what makes it stick.</a:t>
+              <a:t>Do not derive this. State what each piece is doing and move on - handout section 5.2 has the derivation, including why maximising the margin is the same as minimising the norm of w.</a:t>
+            </a:r>
+          </a:p>
+          <a:p>
+            <a:pPr lvl="0" indent="0" marL="0">
+              <a:buNone/>
+            </a:pPr>
+          </a:p>
+          <a:p>
+            <a:pPr lvl="0" indent="0" marL="0">
+              <a:buNone/>
+            </a:pPr>
+            <a:r>
+              <a:rPr/>
+              <a:t>The first term wants a wide slab. The second term wants few violations. C sets the exchange rate between them, and that is the entire content of the expression. Read it out in those words rather than reading the symbols.</a:t>
+            </a:r>
+          </a:p>
+          <a:p>
+            <a:pPr lvl="0" indent="0" marL="0">
+              <a:buNone/>
+            </a:pPr>
+          </a:p>
+          <a:p>
+            <a:pPr lvl="0" indent="0" marL="0">
+              <a:buNone/>
+            </a:pPr>
+            <a:r>
+              <a:rPr/>
+              <a:t>If someone asks about the half in front of the norm: it is there to make the derivative tidy, exactly as in lesson 3’s cost function.</a:t>
             </a:r>
           </a:p>
         </p:txBody>
@@ -4529,49 +4496,55 @@
             </a:pPr>
             <a:r>
               <a:rPr/>
-              <a:t>The linear kernel scores 0.613 - the base rate, exactly as logistic regression did this morning, with the same zero variance across folds.</a:t>
-            </a:r>
-          </a:p>
-          <a:p>
-            <a:pPr lvl="0" indent="0" marL="0">
-              <a:buNone/>
-            </a:pPr>
-          </a:p>
-          <a:p>
-            <a:pPr lvl="0" indent="0" marL="0">
-              <a:buNone/>
-            </a:pPr>
-            <a:r>
-              <a:rPr/>
-              <a:t>Make the point explicitly, because it is the one students most often get backwards: the margin criterion is a better way of CHOOSING among straight lines. It does not give you anything other than a straight line. When no straight line works, choosing the best one optimally still gets you nothing. A better criterion cannot rescue an inadequate hypothesis class.</a:t>
-            </a:r>
-          </a:p>
-          <a:p>
-            <a:pPr lvl="0" indent="0" marL="0">
-              <a:buNone/>
-            </a:pPr>
-          </a:p>
-          <a:p>
-            <a:pPr lvl="0" indent="0" marL="0">
-              <a:buNone/>
-            </a:pPr>
-            <a:r>
-              <a:rPr/>
-              <a:t>Then the RBF row, which is the same algorithm with one argument changed, at 0.947 - the best number in the whole lesson, and within a hair of the 0.96 ceiling.</a:t>
-            </a:r>
-          </a:p>
-          <a:p>
-            <a:pPr lvl="0" indent="0" marL="0">
-              <a:buNone/>
-            </a:pPr>
-          </a:p>
-          <a:p>
-            <a:pPr lvl="0" indent="0" marL="0">
-              <a:buNone/>
-            </a:pPr>
-            <a:r>
-              <a:rPr/>
-              <a:t>The support-vector column says the same thing in a second language, and that is the next slide.</a:t>
+              <a:t>Third appearance of the same idea, and say so - that repetition is the point. Lesson 3 had λ, this morning had k, now C. Every model has one knob that trades fitting this data against surviving the next, and recognising it in an unfamiliar model is worth more than memorising three names.</a:t>
+            </a:r>
+          </a:p>
+          <a:p>
+            <a:pPr lvl="0" indent="0" marL="0">
+              <a:buNone/>
+            </a:pPr>
+          </a:p>
+          <a:p>
+            <a:pPr lvl="0" indent="0" marL="0">
+              <a:buNone/>
+            </a:pPr>
+            <a:r>
+              <a:rPr/>
+              <a:t>Then the direction, which catches people out constantly and is worth writing on the board. Large λ means MORE regularisation. Large C means LESS. They run opposite ways, and scikit-learn’s </a:t>
+            </a:r>
+            <a:r>
+              <a:rPr>
+                <a:latin typeface="Courier"/>
+              </a:rPr>
+              <a:t>C</a:t>
+            </a:r>
+            <a:r>
+              <a:rPr/>
+              <a:t> parameter in </a:t>
+            </a:r>
+            <a:r>
+              <a:rPr>
+                <a:latin typeface="Courier"/>
+              </a:rPr>
+              <a:t>LogisticRegression</a:t>
+            </a:r>
+            <a:r>
+              <a:rPr/>
+              <a:t> has the same inverted convention - it is the reciprocal of the penalty there too.</a:t>
+            </a:r>
+          </a:p>
+          <a:p>
+            <a:pPr lvl="0" indent="0" marL="0">
+              <a:buNone/>
+            </a:pPr>
+          </a:p>
+          <a:p>
+            <a:pPr lvl="0" indent="0" marL="0">
+              <a:buNone/>
+            </a:pPr>
+            <a:r>
+              <a:rPr/>
+              <a:t>Ask them which way they would expect C to run before you tell them. Most guess wrong, and having guessed wrong once is what makes it stick.</a:t>
             </a:r>
           </a:p>
         </p:txBody>
@@ -4777,59 +4750,49 @@
             </a:pPr>
             <a:r>
               <a:rPr/>
-              <a:t>Explain what 79% actually means geometrically. A support vector is a point on the margin or inside it. If 79% of your data is in that position, there is no region of empty space between the classes at all - the model has been forced to place a boundary through a crowd.</a:t>
-            </a:r>
-          </a:p>
-          <a:p>
-            <a:pPr lvl="0" indent="0" marL="0">
-              <a:buNone/>
-            </a:pPr>
-          </a:p>
-          <a:p>
-            <a:pPr lvl="0" indent="0" marL="0">
-              <a:buNone/>
-            </a:pPr>
-            <a:r>
-              <a:rPr/>
-              <a:t>Contrast with 23%, where the model found genuine room and only the points near the edge matter.</a:t>
-            </a:r>
-          </a:p>
-          <a:p>
-            <a:pPr lvl="0" indent="0" marL="0">
-              <a:buNone/>
-            </a:pPr>
-          </a:p>
-          <a:p>
-            <a:pPr lvl="0" indent="0" marL="0">
-              <a:buNone/>
-            </a:pPr>
-            <a:r>
-              <a:rPr/>
-              <a:t>Give them the diagnostic to keep, since it costs nothing: after fitting an SVM, look at </a:t>
-            </a:r>
-            <a:r>
-              <a:rPr>
-                <a:latin typeface="Courier"/>
-              </a:rPr>
-              <a:t>len(model.support_)</a:t>
-            </a:r>
-            <a:r>
-              <a:rPr/>
-              <a:t> over the number of training rows. High means the model is struggling to find room, which usually means the kernel is wrong for the geometry. It is a warning available BEFORE you cross-validate anything.</a:t>
-            </a:r>
-          </a:p>
-          <a:p>
-            <a:pPr lvl="0" indent="0" marL="0">
-              <a:buNone/>
-            </a:pPr>
-          </a:p>
-          <a:p>
-            <a:pPr lvl="0" indent="0" marL="0">
-              <a:buNone/>
-            </a:pPr>
-            <a:r>
-              <a:rPr/>
-              <a:t>Worth adding that it also predicts prediction cost - every support vector is one kernel evaluation per query, so a model needing 79% of the data has thrown away most of the speed advantage over k-NN.</a:t>
+              <a:t>The linear kernel scores 0.613 - the base rate, exactly as logistic regression did this morning, with the same zero variance across folds.</a:t>
+            </a:r>
+          </a:p>
+          <a:p>
+            <a:pPr lvl="0" indent="0" marL="0">
+              <a:buNone/>
+            </a:pPr>
+          </a:p>
+          <a:p>
+            <a:pPr lvl="0" indent="0" marL="0">
+              <a:buNone/>
+            </a:pPr>
+            <a:r>
+              <a:rPr/>
+              <a:t>Make the point explicitly, because it is the one students most often get backwards: the margin criterion is a better way of CHOOSING among straight lines. It does not give you anything other than a straight line. When no straight line works, choosing the best one optimally still gets you nothing. A better criterion cannot rescue an inadequate hypothesis class.</a:t>
+            </a:r>
+          </a:p>
+          <a:p>
+            <a:pPr lvl="0" indent="0" marL="0">
+              <a:buNone/>
+            </a:pPr>
+          </a:p>
+          <a:p>
+            <a:pPr lvl="0" indent="0" marL="0">
+              <a:buNone/>
+            </a:pPr>
+            <a:r>
+              <a:rPr/>
+              <a:t>Then the RBF row, which is the same algorithm with one argument changed, at 0.947 - the best number in the whole lesson, and within a hair of the 0.96 ceiling.</a:t>
+            </a:r>
+          </a:p>
+          <a:p>
+            <a:pPr lvl="0" indent="0" marL="0">
+              <a:buNone/>
+            </a:pPr>
+          </a:p>
+          <a:p>
+            <a:pPr lvl="0" indent="0" marL="0">
+              <a:buNone/>
+            </a:pPr>
+            <a:r>
+              <a:rPr/>
+              <a:t>The support-vector column says the same thing in a second language, and that is the next slide.</a:t>
             </a:r>
           </a:p>
         </p:txBody>
@@ -4911,49 +4874,59 @@
             </a:pPr>
             <a:r>
               <a:rPr/>
-              <a:t>Build the picture in words first and let them see it before the figure appears. Take the scatter plot from the start of the lesson, lift each point off the page by its distance from the centre, and look from the side.</a:t>
-            </a:r>
-          </a:p>
-          <a:p>
-            <a:pPr lvl="0" indent="0" marL="0">
-              <a:buNone/>
-            </a:pPr>
-          </a:p>
-          <a:p>
-            <a:pPr lvl="0" indent="0" marL="0">
-              <a:buNone/>
-            </a:pPr>
-            <a:r>
-              <a:rPr/>
-              <a:t>Then the sentence that reframes the whole afternoon: the classes were never inseparable. Separability is not a property of the data - it is a property of the data AND the coordinates you happen to have measured it in.</a:t>
-            </a:r>
-          </a:p>
-          <a:p>
-            <a:pPr lvl="0" indent="0" marL="0">
-              <a:buNone/>
-            </a:pPr>
-          </a:p>
-          <a:p>
-            <a:pPr lvl="0" indent="0" marL="0">
-              <a:buNone/>
-            </a:pPr>
-            <a:r>
-              <a:rPr/>
-              <a:t>Ask what is unsatisfying about what we just did, and wait for it. We chose that lift by already knowing the answer. We knew the fault mode was radial. In any real problem you do not, and inventing the right coordinate is the hard part - which is exactly the difficulty the kernel trick removes.</a:t>
-            </a:r>
-          </a:p>
-          <a:p>
-            <a:pPr lvl="0" indent="0" marL="0">
-              <a:buNone/>
-            </a:pPr>
-          </a:p>
-          <a:p>
-            <a:pPr lvl="0" indent="0" marL="0">
-              <a:buNone/>
-            </a:pPr>
-            <a:r>
-              <a:rPr/>
-              <a:t>Handout section 5.4.</a:t>
+              <a:t>Explain what 79% actually means geometrically. A support vector is a point on the margin or inside it. If 79% of your data is in that position, there is no region of empty space between the classes at all - the model has been forced to place a boundary through a crowd.</a:t>
+            </a:r>
+          </a:p>
+          <a:p>
+            <a:pPr lvl="0" indent="0" marL="0">
+              <a:buNone/>
+            </a:pPr>
+          </a:p>
+          <a:p>
+            <a:pPr lvl="0" indent="0" marL="0">
+              <a:buNone/>
+            </a:pPr>
+            <a:r>
+              <a:rPr/>
+              <a:t>Contrast with 23%, where the model found genuine room and only the points near the edge matter.</a:t>
+            </a:r>
+          </a:p>
+          <a:p>
+            <a:pPr lvl="0" indent="0" marL="0">
+              <a:buNone/>
+            </a:pPr>
+          </a:p>
+          <a:p>
+            <a:pPr lvl="0" indent="0" marL="0">
+              <a:buNone/>
+            </a:pPr>
+            <a:r>
+              <a:rPr/>
+              <a:t>Give them the diagnostic to keep, since it costs nothing: after fitting an SVM, look at </a:t>
+            </a:r>
+            <a:r>
+              <a:rPr>
+                <a:latin typeface="Courier"/>
+              </a:rPr>
+              <a:t>len(model.support_)</a:t>
+            </a:r>
+            <a:r>
+              <a:rPr/>
+              <a:t> over the number of training rows. High means the model is struggling to find room, which usually means the kernel is wrong for the geometry. It is a warning available BEFORE you cross-validate anything.</a:t>
+            </a:r>
+          </a:p>
+          <a:p>
+            <a:pPr lvl="0" indent="0" marL="0">
+              <a:buNone/>
+            </a:pPr>
+          </a:p>
+          <a:p>
+            <a:pPr lvl="0" indent="0" marL="0">
+              <a:buNone/>
+            </a:pPr>
+            <a:r>
+              <a:rPr/>
+              <a:t>Worth adding that it also predicts prediction cost - every support vector is one kernel evaluation per query, so a model needing 79% of the data has thrown away most of the speed advantage over k-NN.</a:t>
             </a:r>
           </a:p>
         </p:txBody>
@@ -5035,35 +5008,49 @@
             </a:pPr>
             <a:r>
               <a:rPr/>
-              <a:t>The same 1,200 pumps twice: on the left in the plane where they were measured, on the right lifted by their distance from the design point. The gold plane does what no line could.</a:t>
-            </a:r>
-          </a:p>
-          <a:p>
-            <a:pPr lvl="0" indent="0" marL="0">
-              <a:buNone/>
-            </a:pPr>
-          </a:p>
-          <a:p>
-            <a:pPr lvl="0" indent="0" marL="0">
-              <a:buNone/>
-            </a:pPr>
-            <a:r>
-              <a:rPr/>
-              <a:t>Have them look at the right panel and confirm for themselves that a flat horizontal cut separates the colours cleanly. Nothing was added - no new measurement, no extra sensor. The third coordinate is computed from the two they already had.</a:t>
-            </a:r>
-          </a:p>
-          <a:p>
-            <a:pPr lvl="0" indent="0" marL="0">
-              <a:buNone/>
-            </a:pPr>
-          </a:p>
-          <a:p>
-            <a:pPr lvl="0" indent="0" marL="0">
-              <a:buNone/>
-            </a:pPr>
-            <a:r>
-              <a:rPr/>
-              <a:t>Then set up the objection that the next slide answers. This worked because the lift was three-dimensional and we could guess it. The spaces that work in general are enormous - the useful ones are sometimes infinite-dimensional - and computing the coordinates of every point in such a space is impossible.</a:t>
+              <a:t>Build the picture in words first and let them see it before the figure appears. Take the scatter plot from the start of the lesson, lift each point off the page by its distance from the centre, and look from the side.</a:t>
+            </a:r>
+          </a:p>
+          <a:p>
+            <a:pPr lvl="0" indent="0" marL="0">
+              <a:buNone/>
+            </a:pPr>
+          </a:p>
+          <a:p>
+            <a:pPr lvl="0" indent="0" marL="0">
+              <a:buNone/>
+            </a:pPr>
+            <a:r>
+              <a:rPr/>
+              <a:t>Then the sentence that reframes the whole afternoon: the classes were never inseparable. Separability is not a property of the data - it is a property of the data AND the coordinates you happen to have measured it in.</a:t>
+            </a:r>
+          </a:p>
+          <a:p>
+            <a:pPr lvl="0" indent="0" marL="0">
+              <a:buNone/>
+            </a:pPr>
+          </a:p>
+          <a:p>
+            <a:pPr lvl="0" indent="0" marL="0">
+              <a:buNone/>
+            </a:pPr>
+            <a:r>
+              <a:rPr/>
+              <a:t>Ask what is unsatisfying about what we just did, and wait for it. We chose that lift by already knowing the answer. We knew the fault mode was radial. In any real problem you do not, and inventing the right coordinate is the hard part - which is exactly the difficulty the kernel trick removes.</a:t>
+            </a:r>
+          </a:p>
+          <a:p>
+            <a:pPr lvl="0" indent="0" marL="0">
+              <a:buNone/>
+            </a:pPr>
+          </a:p>
+          <a:p>
+            <a:pPr lvl="0" indent="0" marL="0">
+              <a:buNone/>
+            </a:pPr>
+            <a:r>
+              <a:rPr/>
+              <a:t>Handout section 5.4.</a:t>
             </a:r>
           </a:p>
         </p:txBody>
@@ -5145,35 +5132,35 @@
             </a:pPr>
             <a:r>
               <a:rPr/>
-              <a:t>The trick in one sentence: the SVM never needs the coordinates, only the angles and lengths between points, and those can be obtained without ever going there.</a:t>
-            </a:r>
-          </a:p>
-          <a:p>
-            <a:pPr lvl="0" indent="0" marL="0">
-              <a:buNone/>
-            </a:pPr>
-          </a:p>
-          <a:p>
-            <a:pPr lvl="0" indent="0" marL="0">
-              <a:buNone/>
-            </a:pPr>
-            <a:r>
-              <a:rPr/>
-              <a:t>Do not prove it - handout section 5.4 shows where the inner products come from in the dual formulation. The claim to state and let land is that a function of two ordinary two-dimensional vectors returns their inner product in a space of infinite dimension, at the cost of one exponential.</a:t>
-            </a:r>
-          </a:p>
-          <a:p>
-            <a:pPr lvl="0" indent="0" marL="0">
-              <a:buNone/>
-            </a:pPr>
-          </a:p>
-          <a:p>
-            <a:pPr lvl="0" indent="0" marL="0">
-              <a:buNone/>
-            </a:pPr>
-            <a:r>
-              <a:rPr/>
-              <a:t>And close the loop from the previous slide: we chose the lift in the picture by knowing the answer. The RBF kernel does something equivalent without being told, which is exactly why it works on problems where nobody could guess the right coordinates.</a:t>
+              <a:t>The same 1,200 pumps twice: on the left in the plane where they were measured, on the right lifted by their distance from the design point. The gold plane does what no line could.</a:t>
+            </a:r>
+          </a:p>
+          <a:p>
+            <a:pPr lvl="0" indent="0" marL="0">
+              <a:buNone/>
+            </a:pPr>
+          </a:p>
+          <a:p>
+            <a:pPr lvl="0" indent="0" marL="0">
+              <a:buNone/>
+            </a:pPr>
+            <a:r>
+              <a:rPr/>
+              <a:t>Have them look at the right panel and confirm for themselves that a flat horizontal cut separates the colours cleanly. Nothing was added - no new measurement, no extra sensor. The third coordinate is computed from the two they already had.</a:t>
+            </a:r>
+          </a:p>
+          <a:p>
+            <a:pPr lvl="0" indent="0" marL="0">
+              <a:buNone/>
+            </a:pPr>
+          </a:p>
+          <a:p>
+            <a:pPr lvl="0" indent="0" marL="0">
+              <a:buNone/>
+            </a:pPr>
+            <a:r>
+              <a:rPr/>
+              <a:t>Then set up the objection that the next slide answers. This worked because the lift was three-dimensional and we could guess it. The spaces that work in general are enormous - the useful ones are sometimes infinite-dimensional - and computing the coordinates of every point in such a space is impossible.</a:t>
             </a:r>
           </a:p>
         </p:txBody>
@@ -5255,59 +5242,35 @@
             </a:pPr>
             <a:r>
               <a:rPr/>
-              <a:t>One line, and it is the whole of what scikit-learn does when you leave </a:t>
-            </a:r>
-            <a:r>
-              <a:rPr>
-                <a:latin typeface="Courier"/>
-              </a:rPr>
-              <a:t>kernel</a:t>
-            </a:r>
-            <a:r>
-              <a:rPr/>
-              <a:t> at its default.</a:t>
-            </a:r>
-          </a:p>
-          <a:p>
-            <a:pPr lvl="0" indent="0" marL="0">
-              <a:buNone/>
-            </a:pPr>
-          </a:p>
-          <a:p>
-            <a:pPr lvl="0" indent="0" marL="0">
-              <a:buNone/>
-            </a:pPr>
-            <a:r>
-              <a:rPr/>
-              <a:t>Read it aloud as a similarity rather than as a formula: the closer two points are, the nearer the exponent is to zero and the nearer the kernel is to one; far apart, it falls away to nothing. That is all an RBF kernel says - how much does this point look like that one.</a:t>
-            </a:r>
-          </a:p>
-          <a:p>
-            <a:pPr lvl="0" indent="0" marL="0">
-              <a:buNone/>
-            </a:pPr>
-          </a:p>
-          <a:p>
-            <a:pPr lvl="0" indent="0" marL="0">
-              <a:buNone/>
-            </a:pPr>
-            <a:r>
-              <a:rPr/>
-              <a:t>Now say what γ means, because the next two slides turn on it: it sets how far a single training point’s influence reaches. Small γ, wide reach, smooth boundary. Large γ, each point influences only its immediate neighbourhood - and a boundary that can afford an island around every mislabelled pump.</a:t>
-            </a:r>
-          </a:p>
-          <a:p>
-            <a:pPr lvl="0" indent="0" marL="0">
-              <a:buNone/>
-            </a:pPr>
-          </a:p>
-          <a:p>
-            <a:pPr lvl="0" indent="0" marL="0">
-              <a:buNone/>
-            </a:pPr>
-            <a:r>
-              <a:rPr/>
-              <a:t>Worth naming the cost, since this is an engineering course: one exponential per pair of points, so the kernel matrix is m × m. That is why support vector machines are a poor fit above a hundred thousand rows, and it is a property of the method rather than of the implementation.</a:t>
+              <a:t>The trick in one sentence: the SVM never needs the coordinates, only the angles and lengths between points, and those can be obtained without ever going there.</a:t>
+            </a:r>
+          </a:p>
+          <a:p>
+            <a:pPr lvl="0" indent="0" marL="0">
+              <a:buNone/>
+            </a:pPr>
+          </a:p>
+          <a:p>
+            <a:pPr lvl="0" indent="0" marL="0">
+              <a:buNone/>
+            </a:pPr>
+            <a:r>
+              <a:rPr/>
+              <a:t>Do not prove it - handout section 5.4 shows where the inner products come from in the dual formulation. The claim to state and let land is that a function of two ordinary two-dimensional vectors returns their inner product in a space of infinite dimension, at the cost of one exponential.</a:t>
+            </a:r>
+          </a:p>
+          <a:p>
+            <a:pPr lvl="0" indent="0" marL="0">
+              <a:buNone/>
+            </a:pPr>
+          </a:p>
+          <a:p>
+            <a:pPr lvl="0" indent="0" marL="0">
+              <a:buNone/>
+            </a:pPr>
+            <a:r>
+              <a:rPr/>
+              <a:t>And close the loop from the previous slide: we chose the lift in the picture by knowing the answer. The RBF kernel does something equivalent without being told, which is exactly why it works on problems where nobody could guess the right coordinates.</a:t>
             </a:r>
           </a:p>
         </p:txBody>
@@ -5389,53 +5352,59 @@
             </a:pPr>
             <a:r>
               <a:rPr/>
-              <a:t>Read the two columns against each other, exactly as lesson 5 taught, and let the last row do the work.</a:t>
-            </a:r>
-          </a:p>
-          <a:p>
-            <a:pPr lvl="0" indent="0" marL="0">
-              <a:buNone/>
-            </a:pPr>
-          </a:p>
-          <a:p>
-            <a:pPr lvl="0" indent="0" marL="0">
-              <a:buNone/>
-            </a:pPr>
-            <a:r>
-              <a:rPr/>
-              <a:t>The bottom row has the best training score on the slide - 0.995, nearly perfect - and the worst honest one. That is the signature of overfitting, and here it is not inferred from theory but measured on the same data by two different procedures.</a:t>
-            </a:r>
-          </a:p>
-          <a:p>
-            <a:pPr lvl="0" indent="0" marL="0">
-              <a:buNone/>
-            </a:pPr>
-          </a:p>
-          <a:p>
-            <a:pPr lvl="0" indent="0" marL="0">
-              <a:buNone/>
-            </a:pPr>
-            <a:r>
-              <a:rPr b="1"/>
-              <a:t>Now the second predictable mistake, and defend the instinct.</a:t>
-            </a:r>
-            <a:r>
-              <a:rPr/>
-              <a:t> Choosing between these three on the training score selects the WORST model, with complete confidence and a very impressive number to report. And the instinct behind it is not stupid: a higher score on the data you have is, in every other part of engineering, evidence of a better system. Fitting the data well is what we spent lessons 3 and 4 doing. What breaks the analogy is that a flexible model can fit data it has already been shown without learning anything transferable.</a:t>
-            </a:r>
-          </a:p>
-          <a:p>
-            <a:pPr lvl="0" indent="0" marL="0">
-              <a:buNone/>
-            </a:pPr>
-          </a:p>
-          <a:p>
-            <a:pPr lvl="0" indent="0" marL="0">
-              <a:buNone/>
-            </a:pPr>
-            <a:r>
-              <a:rPr/>
-              <a:t>The reason this table is on the slide rather than in the handout is that the next slide shows the same three settings as pictures - so the failure is visible as well as measurable, which is rare.</a:t>
+              <a:t>One line, and it is the whole of what scikit-learn does when you leave </a:t>
+            </a:r>
+            <a:r>
+              <a:rPr>
+                <a:latin typeface="Courier"/>
+              </a:rPr>
+              <a:t>kernel</a:t>
+            </a:r>
+            <a:r>
+              <a:rPr/>
+              <a:t> at its default.</a:t>
+            </a:r>
+          </a:p>
+          <a:p>
+            <a:pPr lvl="0" indent="0" marL="0">
+              <a:buNone/>
+            </a:pPr>
+          </a:p>
+          <a:p>
+            <a:pPr lvl="0" indent="0" marL="0">
+              <a:buNone/>
+            </a:pPr>
+            <a:r>
+              <a:rPr/>
+              <a:t>Read it aloud as a similarity rather than as a formula: the closer two points are, the nearer the exponent is to zero and the nearer the kernel is to one; far apart, it falls away to nothing. That is all an RBF kernel says - how much does this point look like that one.</a:t>
+            </a:r>
+          </a:p>
+          <a:p>
+            <a:pPr lvl="0" indent="0" marL="0">
+              <a:buNone/>
+            </a:pPr>
+          </a:p>
+          <a:p>
+            <a:pPr lvl="0" indent="0" marL="0">
+              <a:buNone/>
+            </a:pPr>
+            <a:r>
+              <a:rPr/>
+              <a:t>Now say what γ means, because the next two slides turn on it: it sets how far a single training point’s influence reaches. Small γ, wide reach, smooth boundary. Large γ, each point influences only its immediate neighbourhood - and a boundary that can afford an island around every mislabelled pump.</a:t>
+            </a:r>
+          </a:p>
+          <a:p>
+            <a:pPr lvl="0" indent="0" marL="0">
+              <a:buNone/>
+            </a:pPr>
+          </a:p>
+          <a:p>
+            <a:pPr lvl="0" indent="0" marL="0">
+              <a:buNone/>
+            </a:pPr>
+            <a:r>
+              <a:rPr/>
+              <a:t>Worth naming the cost, since this is an engineering course: one exponential per pair of points, so the kernel matrix is m × m. That is why support vector machines are a poor fit above a hundred thousand rows, and it is a property of the method rather than of the implementation.</a:t>
             </a:r>
           </a:p>
         </p:txBody>
@@ -5517,63 +5486,53 @@
             </a:pPr>
             <a:r>
               <a:rPr/>
-              <a:t>Three settings, with training and cross-validated scores in each title. Read them together.</a:t>
-            </a:r>
-          </a:p>
-          <a:p>
-            <a:pPr lvl="0" indent="0" marL="0">
-              <a:buNone/>
-            </a:pPr>
-          </a:p>
-          <a:p>
-            <a:pPr lvl="0" indent="0" marL="0">
-              <a:buNone/>
-            </a:pPr>
-            <a:r>
-              <a:rPr/>
-              <a:t>Left, γ = 0.1: a smooth boundary, slightly too smooth, and the two scores agree. Middle, γ = 1: close to the true envelope, and the best honest score.</a:t>
-            </a:r>
-          </a:p>
-          <a:p>
-            <a:pPr lvl="0" indent="0" marL="0">
-              <a:buNone/>
-            </a:pPr>
-          </a:p>
-          <a:p>
-            <a:pPr lvl="0" indent="0" marL="0">
-              <a:buNone/>
-            </a:pPr>
-            <a:r>
-              <a:rPr/>
-              <a:t>Right is the one to sit on. The boundary has broken into bubbles - small islands around individual points, including the mislabelled ones. That is what a 0.995 training score looks like from the outside: the model has drawn a private territory around each flipped label so that it can get it right.</a:t>
-            </a:r>
-          </a:p>
-          <a:p>
-            <a:pPr lvl="0" indent="0" marL="0">
-              <a:buNone/>
-            </a:pPr>
-          </a:p>
-          <a:p>
-            <a:pPr lvl="0" indent="0" marL="0">
-              <a:buNone/>
-            </a:pPr>
-            <a:r>
-              <a:rPr/>
-              <a:t>Ask them what happens to a new pump landing in the gap between two bubbles. That is the 0.902.</a:t>
-            </a:r>
-          </a:p>
-          <a:p>
-            <a:pPr lvl="0" indent="0" marL="0">
-              <a:buNone/>
-            </a:pPr>
-          </a:p>
-          <a:p>
-            <a:pPr lvl="0" indent="0" marL="0">
-              <a:buNone/>
-            </a:pPr>
-            <a:r>
-              <a:rPr/>
-              <a:t>The reason this slide matters more than the table: they have seen overfitting as a curve on a plot since lesson 5. Here it is a shape in the input space, and the shape is obviously wrong in a way no number is. When you can plot the boundary, plot it.</a:t>
+              <a:t>Read the two columns against each other, exactly as lesson 5 taught, and let the last row do the work.</a:t>
+            </a:r>
+          </a:p>
+          <a:p>
+            <a:pPr lvl="0" indent="0" marL="0">
+              <a:buNone/>
+            </a:pPr>
+          </a:p>
+          <a:p>
+            <a:pPr lvl="0" indent="0" marL="0">
+              <a:buNone/>
+            </a:pPr>
+            <a:r>
+              <a:rPr/>
+              <a:t>The bottom row has the best training score on the slide - 0.995, nearly perfect - and the worst honest one. That is the signature of overfitting, and here it is not inferred from theory but measured on the same data by two different procedures.</a:t>
+            </a:r>
+          </a:p>
+          <a:p>
+            <a:pPr lvl="0" indent="0" marL="0">
+              <a:buNone/>
+            </a:pPr>
+          </a:p>
+          <a:p>
+            <a:pPr lvl="0" indent="0" marL="0">
+              <a:buNone/>
+            </a:pPr>
+            <a:r>
+              <a:rPr b="1"/>
+              <a:t>Now the second predictable mistake, and defend the instinct.</a:t>
+            </a:r>
+            <a:r>
+              <a:rPr/>
+              <a:t> Choosing between these three on the training score selects the WORST model, with complete confidence and a very impressive number to report. And the instinct behind it is not stupid: a higher score on the data you have is, in every other part of engineering, evidence of a better system. Fitting the data well is what we spent lessons 3 and 4 doing. What breaks the analogy is that a flexible model can fit data it has already been shown without learning anything transferable.</a:t>
+            </a:r>
+          </a:p>
+          <a:p>
+            <a:pPr lvl="0" indent="0" marL="0">
+              <a:buNone/>
+            </a:pPr>
+          </a:p>
+          <a:p>
+            <a:pPr lvl="0" indent="0" marL="0">
+              <a:buNone/>
+            </a:pPr>
+            <a:r>
+              <a:rPr/>
+              <a:t>The reason this table is on the slide rather than in the handout is that the next slide shows the same three settings as pictures - so the failure is visible as well as measurable, which is rare.</a:t>
             </a:r>
           </a:p>
         </p:txBody>
@@ -5655,49 +5614,63 @@
             </a:pPr>
             <a:r>
               <a:rPr/>
-              <a:t>Run notebooks/03. Eighteen minutes.</a:t>
-            </a:r>
-          </a:p>
-          <a:p>
-            <a:pPr lvl="0" indent="0" marL="0">
-              <a:buNone/>
-            </a:pPr>
-          </a:p>
-          <a:p>
-            <a:pPr lvl="0" indent="0" marL="0">
-              <a:buNone/>
-            </a:pPr>
-            <a:r>
-              <a:rPr/>
-              <a:t>The cell to protect is the γ sweep with the boundary drawn at each setting. Let them turn γ up themselves and watch the bubbles form - it is the most direct experience of overfitting available in this course.</a:t>
-            </a:r>
-          </a:p>
-          <a:p>
-            <a:pPr lvl="0" indent="0" marL="0">
-              <a:buNone/>
-            </a:pPr>
-          </a:p>
-          <a:p>
-            <a:pPr lvl="0" indent="0" marL="0">
-              <a:buNone/>
-            </a:pPr>
-            <a:r>
-              <a:rPr/>
-              <a:t>Have them print the support-vector fraction for the linear and RBF kernels side by side. Two numbers, and it makes the diagnostic real rather than a claim on a slide.</a:t>
-            </a:r>
-          </a:p>
-          <a:p>
-            <a:pPr lvl="0" indent="0" marL="0">
-              <a:buNone/>
-            </a:pPr>
-          </a:p>
-          <a:p>
-            <a:pPr lvl="0" indent="0" marL="0">
-              <a:buNone/>
-            </a:pPr>
-            <a:r>
-              <a:rPr/>
-              <a:t>If time runs short, skip the C sweep and set it as reading: the table is in handout section 5.5.</a:t>
+              <a:t>Three settings, with training and cross-validated scores in each title. Read them together.</a:t>
+            </a:r>
+          </a:p>
+          <a:p>
+            <a:pPr lvl="0" indent="0" marL="0">
+              <a:buNone/>
+            </a:pPr>
+          </a:p>
+          <a:p>
+            <a:pPr lvl="0" indent="0" marL="0">
+              <a:buNone/>
+            </a:pPr>
+            <a:r>
+              <a:rPr/>
+              <a:t>Left, γ = 0.1: a smooth boundary, slightly too smooth, and the two scores agree. Middle, γ = 1: close to the true envelope, and the best honest score.</a:t>
+            </a:r>
+          </a:p>
+          <a:p>
+            <a:pPr lvl="0" indent="0" marL="0">
+              <a:buNone/>
+            </a:pPr>
+          </a:p>
+          <a:p>
+            <a:pPr lvl="0" indent="0" marL="0">
+              <a:buNone/>
+            </a:pPr>
+            <a:r>
+              <a:rPr/>
+              <a:t>Right is the one to sit on. The boundary has broken into bubbles - small islands around individual points, including the mislabelled ones. That is what a 0.995 training score looks like from the outside: the model has drawn a private territory around each flipped label so that it can get it right.</a:t>
+            </a:r>
+          </a:p>
+          <a:p>
+            <a:pPr lvl="0" indent="0" marL="0">
+              <a:buNone/>
+            </a:pPr>
+          </a:p>
+          <a:p>
+            <a:pPr lvl="0" indent="0" marL="0">
+              <a:buNone/>
+            </a:pPr>
+            <a:r>
+              <a:rPr/>
+              <a:t>Ask them what happens to a new pump landing in the gap between two bubbles. That is the 0.902.</a:t>
+            </a:r>
+          </a:p>
+          <a:p>
+            <a:pPr lvl="0" indent="0" marL="0">
+              <a:buNone/>
+            </a:pPr>
+          </a:p>
+          <a:p>
+            <a:pPr lvl="0" indent="0" marL="0">
+              <a:buNone/>
+            </a:pPr>
+            <a:r>
+              <a:rPr/>
+              <a:t>The reason this slide matters more than the table: they have seen overfitting as a curve on a plot since lesson 5. Here it is a shape in the input space, and the shape is obviously wrong in a way no number is. When you can plot the boundary, plot it.</a:t>
             </a:r>
           </a:p>
         </p:txBody>
@@ -5779,57 +5752,49 @@
             </a:pPr>
             <a:r>
               <a:rPr/>
-              <a:t>Everything in the lesson on the same 1,200 pumps, cross-validated the same way.</a:t>
-            </a:r>
-          </a:p>
-          <a:p>
-            <a:pPr lvl="0" indent="0" marL="0">
-              <a:buNone/>
-            </a:pPr>
-          </a:p>
-          <a:p>
-            <a:pPr lvl="0" indent="0" marL="0">
-              <a:buNone/>
-            </a:pPr>
-            <a:r>
-              <a:rPr/>
-              <a:t>Read the top three rows together: all exactly 0.613, and all three are linear. Then the bottom three, all near the ceiling, reached by three completely unrelated routes - remembering the neighbourhood, assuming independence, bending the space. There is no single idea shared between them.</a:t>
-            </a:r>
-          </a:p>
-          <a:p>
-            <a:pPr lvl="0" indent="0" marL="0">
-              <a:buNone/>
-            </a:pPr>
-          </a:p>
-          <a:p>
-            <a:pPr lvl="0" indent="0" marL="0">
-              <a:buNone/>
-            </a:pPr>
-            <a:r>
-              <a:rPr/>
-              <a:t>Then the number that is the lesson: the gap between best and worst is </a:t>
-            </a:r>
-            <a:r>
-              <a:rPr b="1"/>
-              <a:t>0.334</a:t>
-            </a:r>
-            <a:r>
-              <a:rPr/>
-              <a:t>. Larger than any difference this course has shown between a good model and a carefully tuned one - lesson 5’s entire hyperparameter search moved things by a few hundredths.</a:t>
-            </a:r>
-          </a:p>
-          <a:p>
-            <a:pPr lvl="0" indent="0" marL="0">
-              <a:buNone/>
-            </a:pPr>
-          </a:p>
-          <a:p>
-            <a:pPr lvl="0" indent="0" marL="0">
-              <a:buNone/>
-            </a:pPr>
-            <a:r>
-              <a:rPr/>
-              <a:t>Say the conclusion plainly, and it is the practical takeaway of the whole lesson: choosing the right family matters far more than tuning the wrong one. Nobody in the top three rows could have tuned their way out. And the way to tell which family you need is to look at the data first, which is what lesson 2 was for.</a:t>
+              <a:t>Run notebooks/03. Eighteen minutes.</a:t>
+            </a:r>
+          </a:p>
+          <a:p>
+            <a:pPr lvl="0" indent="0" marL="0">
+              <a:buNone/>
+            </a:pPr>
+          </a:p>
+          <a:p>
+            <a:pPr lvl="0" indent="0" marL="0">
+              <a:buNone/>
+            </a:pPr>
+            <a:r>
+              <a:rPr/>
+              <a:t>The cell to protect is the γ sweep with the boundary drawn at each setting. Let them turn γ up themselves and watch the bubbles form - it is the most direct experience of overfitting available in this course.</a:t>
+            </a:r>
+          </a:p>
+          <a:p>
+            <a:pPr lvl="0" indent="0" marL="0">
+              <a:buNone/>
+            </a:pPr>
+          </a:p>
+          <a:p>
+            <a:pPr lvl="0" indent="0" marL="0">
+              <a:buNone/>
+            </a:pPr>
+            <a:r>
+              <a:rPr/>
+              <a:t>Have them print the support-vector fraction for the linear and RBF kernels side by side. Two numbers, and it makes the diagnostic real rather than a claim on a slide.</a:t>
+            </a:r>
+          </a:p>
+          <a:p>
+            <a:pPr lvl="0" indent="0" marL="0">
+              <a:buNone/>
+            </a:pPr>
+          </a:p>
+          <a:p>
+            <a:pPr lvl="0" indent="0" marL="0">
+              <a:buNone/>
+            </a:pPr>
+            <a:r>
+              <a:rPr/>
+              <a:t>If time runs short, skip the C sweep and set it as reading: the table is in handout section 5.5.</a:t>
             </a:r>
           </a:p>
         </p:txBody>
@@ -5911,35 +5876,57 @@
             </a:pPr>
             <a:r>
               <a:rPr/>
-              <a:t>A table to photograph. Work down it and attach today’s evidence to each row, so it is remembered as a set of conclusions rather than as advice.</a:t>
-            </a:r>
-          </a:p>
-          <a:p>
-            <a:pPr lvl="0" indent="0" marL="0">
-              <a:buNone/>
-            </a:pPr>
-          </a:p>
-          <a:p>
-            <a:pPr lvl="0" indent="0" marL="0">
-              <a:buNone/>
-            </a:pPr>
-            <a:r>
-              <a:rPr/>
-              <a:t>Row two deserves a sentence on its own, because it is the one that sounds wrong after the last hour. Text classification is the canonical case: tens of thousands of word-count features, an assumption that is transparently false, and a method that works anyway - because being roughly right in ten thousand dimensions beats being unable to estimate anything at all. Also mention Naive Bayes as a baseline: it trains in one pass, so if your tuned model does not beat it you have learned something quickly and cheaply.</a:t>
-            </a:r>
-          </a:p>
-          <a:p>
-            <a:pPr lvl="0" indent="0" marL="0">
-              <a:buNone/>
-            </a:pPr>
-          </a:p>
-          <a:p>
-            <a:pPr lvl="0" indent="0" marL="0">
-              <a:buNone/>
-            </a:pPr>
-            <a:r>
-              <a:rPr/>
-              <a:t>One row that did not fit and should be said out loud: when you need to explain the decision to the person affected, none of today’s three will do it. A support vector machine in a lifted space has no explanation a customer would accept. Lesson 3’s Resources document covers why that is sometimes a legal requirement rather than a preference.</a:t>
+              <a:t>Everything in the lesson on the same 1,200 pumps, cross-validated the same way.</a:t>
+            </a:r>
+          </a:p>
+          <a:p>
+            <a:pPr lvl="0" indent="0" marL="0">
+              <a:buNone/>
+            </a:pPr>
+          </a:p>
+          <a:p>
+            <a:pPr lvl="0" indent="0" marL="0">
+              <a:buNone/>
+            </a:pPr>
+            <a:r>
+              <a:rPr/>
+              <a:t>Read the top three rows together: all exactly 0.613, and all three are linear. Then the bottom three, all near the ceiling, reached by three completely unrelated routes - remembering the neighbourhood, assuming independence, bending the space. There is no single idea shared between them.</a:t>
+            </a:r>
+          </a:p>
+          <a:p>
+            <a:pPr lvl="0" indent="0" marL="0">
+              <a:buNone/>
+            </a:pPr>
+          </a:p>
+          <a:p>
+            <a:pPr lvl="0" indent="0" marL="0">
+              <a:buNone/>
+            </a:pPr>
+            <a:r>
+              <a:rPr/>
+              <a:t>Then the number that is the lesson: the gap between best and worst is </a:t>
+            </a:r>
+            <a:r>
+              <a:rPr b="1"/>
+              <a:t>0.334</a:t>
+            </a:r>
+            <a:r>
+              <a:rPr/>
+              <a:t>. Larger than any difference this course has shown between a good model and a carefully tuned one - lesson 5’s entire hyperparameter search moved things by a few hundredths.</a:t>
+            </a:r>
+          </a:p>
+          <a:p>
+            <a:pPr lvl="0" indent="0" marL="0">
+              <a:buNone/>
+            </a:pPr>
+          </a:p>
+          <a:p>
+            <a:pPr lvl="0" indent="0" marL="0">
+              <a:buNone/>
+            </a:pPr>
+            <a:r>
+              <a:rPr/>
+              <a:t>Say the conclusion plainly, and it is the practical takeaway of the whole lesson: choosing the right family matters far more than tuning the wrong one. Nobody in the top three rows could have tuned their way out. And the way to tell which family you need is to look at the data first, which is what lesson 2 was for.</a:t>
             </a:r>
           </a:p>
         </p:txBody>
@@ -6153,49 +6140,35 @@
             </a:pPr>
             <a:r>
               <a:rPr/>
-              <a:t>Close on the number they opened the second segment with, and say it one more time: seventy per cent. In a hundred dimensions the nearest point in the entire dataset is seven tenths of the way to the farthest, and every method built on distance is operating on a quantity that has stopped varying.</a:t>
-            </a:r>
-          </a:p>
-          <a:p>
-            <a:pPr lvl="0" indent="0" marL="0">
-              <a:buNone/>
-            </a:pPr>
-          </a:p>
-          <a:p>
-            <a:pPr lvl="0" indent="0" marL="0">
-              <a:buNone/>
-            </a:pPr>
-            <a:r>
-              <a:rPr/>
-              <a:t>If they remember one habit from today, make it the diagnostic pair: before reaching for a model, look at the shape of the data; after fitting one, check whether the assumption it depends on is actually satisfied on your data. Two lines of code gave us the −0.006 that explained the 0.933.</a:t>
-            </a:r>
-          </a:p>
-          <a:p>
-            <a:pPr lvl="0" indent="0" marL="0">
-              <a:buNone/>
-            </a:pPr>
-          </a:p>
-          <a:p>
-            <a:pPr lvl="0" indent="0" marL="0">
-              <a:buNone/>
-            </a:pPr>
-            <a:r>
-              <a:rPr/>
-              <a:t>And the correction to the instinct that this lesson exists to install: more features is not free. It is nearly free for a linear model and it is expensive for anything built on a distance.</a:t>
-            </a:r>
-          </a:p>
-          <a:p>
-            <a:pPr lvl="0" indent="0" marL="0">
-              <a:buNone/>
-            </a:pPr>
-          </a:p>
-          <a:p>
-            <a:pPr lvl="0" indent="0" marL="0">
-              <a:buNone/>
-            </a:pPr>
-            <a:r>
-              <a:rPr/>
-              <a:t>Handout section 7 lists all of this with the section numbers.</a:t>
+              <a:t>A table to photograph. Work down it and attach today’s evidence to each row, so it is remembered as a set of conclusions rather than as advice.</a:t>
+            </a:r>
+          </a:p>
+          <a:p>
+            <a:pPr lvl="0" indent="0" marL="0">
+              <a:buNone/>
+            </a:pPr>
+          </a:p>
+          <a:p>
+            <a:pPr lvl="0" indent="0" marL="0">
+              <a:buNone/>
+            </a:pPr>
+            <a:r>
+              <a:rPr/>
+              <a:t>Row two deserves a sentence on its own, because it is the one that sounds wrong after the last hour. Text classification is the canonical case: tens of thousands of word-count features, an assumption that is transparently false, and a method that works anyway - because being roughly right in ten thousand dimensions beats being unable to estimate anything at all. Also mention Naive Bayes as a baseline: it trains in one pass, so if your tuned model does not beat it you have learned something quickly and cheaply.</a:t>
+            </a:r>
+          </a:p>
+          <a:p>
+            <a:pPr lvl="0" indent="0" marL="0">
+              <a:buNone/>
+            </a:pPr>
+          </a:p>
+          <a:p>
+            <a:pPr lvl="0" indent="0" marL="0">
+              <a:buNone/>
+            </a:pPr>
+            <a:r>
+              <a:rPr/>
+              <a:t>One row that did not fit and should be said out loud: when you need to explain the decision to the person affected, none of today’s three will do it. A support vector machine in a lifted space has no explanation a customer would accept. Lesson 3’s Resources document covers why that is sometimes a legal requirement rather than a preference.</a:t>
             </a:r>
           </a:p>
         </p:txBody>
@@ -6277,49 +6250,49 @@
             </a:pPr>
             <a:r>
               <a:rPr/>
-              <a:t>Set it explicitly and say the deadline out loud: next Friday, 6 November.</a:t>
-            </a:r>
-          </a:p>
-          <a:p>
-            <a:pPr lvl="0" indent="0" marL="0">
-              <a:buNone/>
-            </a:pPr>
-          </a:p>
-          <a:p>
-            <a:pPr lvl="0" indent="0" marL="0">
-              <a:buNone/>
-            </a:pPr>
-            <a:r>
-              <a:rPr/>
-              <a:t>The marks are for the reasoning, not for the accuracy. A well-argued choice that scores slightly worse beats a lucky winner with no justification - and the argument has to reference the data, in the way that the −0.006 justified Naive Bayes on the pumps this afternoon.</a:t>
-            </a:r>
-          </a:p>
-          <a:p>
-            <a:pPr lvl="0" indent="0" marL="0">
-              <a:buNone/>
-            </a:pPr>
-          </a:p>
-          <a:p>
-            <a:pPr lvl="0" indent="0" marL="0">
-              <a:buNone/>
-            </a:pPr>
-            <a:r>
-              <a:rPr/>
-              <a:t>Remind them that everything must be cross-validated and reported with a spread, in the format lesson 5 set. Scaling goes inside the pipeline; that will be checked.</a:t>
-            </a:r>
-          </a:p>
-          <a:p>
-            <a:pPr lvl="0" indent="0" marL="0">
-              <a:buNone/>
-            </a:pPr>
-          </a:p>
-          <a:p>
-            <a:pPr lvl="0" indent="0" marL="0">
-              <a:buNone/>
-            </a:pPr>
-            <a:r>
-              <a:rPr/>
-              <a:t>Next week: decision trees and ensembles. A fourth family, with a different answer again to the same question - how do you draw a boundary that is not a line.</a:t>
+              <a:t>Close on the number they opened the second segment with, and say it one more time: seventy per cent. In a hundred dimensions the nearest point in the entire dataset is seven tenths of the way to the farthest, and every method built on distance is operating on a quantity that has stopped varying.</a:t>
+            </a:r>
+          </a:p>
+          <a:p>
+            <a:pPr lvl="0" indent="0" marL="0">
+              <a:buNone/>
+            </a:pPr>
+          </a:p>
+          <a:p>
+            <a:pPr lvl="0" indent="0" marL="0">
+              <a:buNone/>
+            </a:pPr>
+            <a:r>
+              <a:rPr/>
+              <a:t>If they remember one habit from today, make it the diagnostic pair: before reaching for a model, look at the shape of the data; after fitting one, check whether the assumption it depends on is actually satisfied on your data. Two lines of code gave us the −0.006 that explained the 0.933.</a:t>
+            </a:r>
+          </a:p>
+          <a:p>
+            <a:pPr lvl="0" indent="0" marL="0">
+              <a:buNone/>
+            </a:pPr>
+          </a:p>
+          <a:p>
+            <a:pPr lvl="0" indent="0" marL="0">
+              <a:buNone/>
+            </a:pPr>
+            <a:r>
+              <a:rPr/>
+              <a:t>And the correction to the instinct that this lesson exists to install: more features is not free. It is nearly free for a linear model and it is expensive for anything built on a distance.</a:t>
+            </a:r>
+          </a:p>
+          <a:p>
+            <a:pPr lvl="0" indent="0" marL="0">
+              <a:buNone/>
+            </a:pPr>
+          </a:p>
+          <a:p>
+            <a:pPr lvl="0" indent="0" marL="0">
+              <a:buNone/>
+            </a:pPr>
+            <a:r>
+              <a:rPr/>
+              <a:t>Handout section 7 lists all of this with the section numbers.</a:t>
             </a:r>
           </a:p>
         </p:txBody>
@@ -6342,6 +6315,130 @@
             <a:fld id="{18BDFEC3-8487-43E8-A154-7C12CBC1FFF2}" type="slidenum">
               <a:rPr lang="en-US"/>
               <a:t>52</a:t>
+            </a:fld>
+            <a:endParaRPr lang="en-US"/>
+          </a:p>
+        </p:txBody>
+      </p:sp>
+    </p:spTree>
+  </p:cSld>
+</p:notes>
+</file>
+
+<file path=ppt/notesSlides/notesSlide52.xml><?xml version="1.0" encoding="utf-8"?>
+<p:notes xmlns:a="http://schemas.openxmlformats.org/drawingml/2006/main" xmlns:r="http://schemas.openxmlformats.org/officeDocument/2006/relationships" xmlns:p="http://schemas.openxmlformats.org/presentationml/2006/main">
+  <p:cSld>
+    <p:spTree>
+      <p:nvGrpSpPr>
+        <p:cNvPr id="1" name=""/>
+        <p:cNvGrpSpPr/>
+        <p:nvPr/>
+      </p:nvGrpSpPr>
+      <p:grpSpPr>
+        <a:xfrm>
+          <a:off x="0" y="0"/>
+          <a:ext cx="0" cy="0"/>
+          <a:chOff x="0" y="0"/>
+          <a:chExt cx="0" cy="0"/>
+        </a:xfrm>
+      </p:grpSpPr>
+      <p:sp>
+        <p:nvSpPr>
+          <p:cNvPr id="2" name="Slide Image Placeholder 1"/>
+          <p:cNvSpPr>
+            <a:spLocks noGrp="1" noRot="1" noChangeAspect="1"/>
+          </p:cNvSpPr>
+          <p:nvPr>
+            <p:ph type="sldImg"/>
+          </p:nvPr>
+        </p:nvSpPr>
+        <p:spPr/>
+      </p:sp>
+      <p:sp>
+        <p:nvSpPr>
+          <p:cNvPr id="3" name="Notes Placeholder 2"/>
+          <p:cNvSpPr>
+            <a:spLocks noGrp="1"/>
+          </p:cNvSpPr>
+          <p:nvPr>
+            <p:ph type="body" idx="1"/>
+          </p:nvPr>
+        </p:nvSpPr>
+        <p:spPr/>
+        <p:txBody>
+          <a:bodyPr/>
+          <a:lstStyle/>
+          <a:p>
+            <a:pPr lvl="0" indent="0" marL="0">
+              <a:buNone/>
+            </a:pPr>
+            <a:r>
+              <a:rPr/>
+              <a:t>Set it explicitly and say the deadline out loud: next Friday, 6 November.</a:t>
+            </a:r>
+          </a:p>
+          <a:p>
+            <a:pPr lvl="0" indent="0" marL="0">
+              <a:buNone/>
+            </a:pPr>
+          </a:p>
+          <a:p>
+            <a:pPr lvl="0" indent="0" marL="0">
+              <a:buNone/>
+            </a:pPr>
+            <a:r>
+              <a:rPr/>
+              <a:t>The marks are for the reasoning, not for the accuracy. A well-argued choice that scores slightly worse beats a lucky winner with no justification - and the argument has to reference the data, in the way that the −0.006 justified Naive Bayes on the pumps this afternoon.</a:t>
+            </a:r>
+          </a:p>
+          <a:p>
+            <a:pPr lvl="0" indent="0" marL="0">
+              <a:buNone/>
+            </a:pPr>
+          </a:p>
+          <a:p>
+            <a:pPr lvl="0" indent="0" marL="0">
+              <a:buNone/>
+            </a:pPr>
+            <a:r>
+              <a:rPr/>
+              <a:t>Remind them that everything must be cross-validated and reported with a spread, in the format lesson 5 set. Scaling goes inside the pipeline; that will be checked.</a:t>
+            </a:r>
+          </a:p>
+          <a:p>
+            <a:pPr lvl="0" indent="0" marL="0">
+              <a:buNone/>
+            </a:pPr>
+          </a:p>
+          <a:p>
+            <a:pPr lvl="0" indent="0" marL="0">
+              <a:buNone/>
+            </a:pPr>
+            <a:r>
+              <a:rPr/>
+              <a:t>Next week: decision trees and ensembles. A fourth family, with a different answer again to the same question - how do you draw a boundary that is not a line.</a:t>
+            </a:r>
+          </a:p>
+        </p:txBody>
+      </p:sp>
+      <p:sp>
+        <p:nvSpPr>
+          <p:cNvPr id="4" name="Slide Number Placeholder 3"/>
+          <p:cNvSpPr>
+            <a:spLocks noGrp="1"/>
+          </p:cNvSpPr>
+          <p:nvPr>
+            <p:ph type="sldNum" sz="quarter" idx="10"/>
+          </p:nvPr>
+        </p:nvSpPr>
+        <p:spPr/>
+        <p:txBody>
+          <a:bodyPr/>
+          <a:lstStyle/>
+          <a:p>
+            <a:fld id="{18BDFEC3-8487-43E8-A154-7C12CBC1FFF2}" type="slidenum">
+              <a:rPr lang="en-US"/>
+              <a:t>53</a:t>
             </a:fld>
             <a:endParaRPr lang="en-US"/>
           </a:p>
@@ -14129,8 +14226,8 @@
         </p:nvSpPr>
         <p:spPr>
           <a:xfrm>
-            <a:off x="457200" y="205740"/>
-            <a:ext cx="8229600" cy="874395"/>
+            <a:off x="457200" y="205979"/>
+            <a:ext cx="8229600" cy="857250"/>
           </a:xfrm>
         </p:spPr>
         <p:txBody>
@@ -14149,18 +14246,18 @@
       </p:sp>
       <p:sp>
         <p:nvSpPr>
-          <p:cNvPr id="4" name="Text Placeholder 3"/>
-          <p:cNvSpPr>
-            <a:spLocks noGrp="1"/>
-          </p:cNvSpPr>
-          <p:nvPr>
-            <p:ph idx="2" sz="half" type="body"/>
+          <p:cNvPr id="3" name="Content Placeholder 2"/>
+          <p:cNvSpPr>
+            <a:spLocks noGrp="1"/>
+          </p:cNvSpPr>
+          <p:nvPr>
+            <p:ph idx="1"/>
           </p:nvPr>
         </p:nvSpPr>
         <p:spPr>
           <a:xfrm>
-            <a:off x="457200" y="1183005"/>
-            <a:ext cx="8229600" cy="2185987"/>
+            <a:off x="457200" y="1200151"/>
+            <a:ext cx="8229600" cy="3394472"/>
           </a:xfrm>
         </p:spPr>
         <p:txBody>
@@ -14193,36 +14290,6 @@
           </a:p>
         </p:txBody>
       </p:sp>
-      <p:pic>
-        <p:nvPicPr>
-          <p:cNvPr descr="eq_d7392721ca.png" id="0" name="Picture 1"/>
-          <p:cNvPicPr>
-            <a:picLocks noGrp="1" noChangeAspect="1"/>
-          </p:cNvPicPr>
-          <p:nvPr/>
-        </p:nvPicPr>
-        <p:blipFill>
-          <a:blip r:embed="rId3"/>
-          <a:stretch>
-            <a:fillRect/>
-          </a:stretch>
-        </p:blipFill>
-        <p:spPr bwMode="auto">
-          <a:xfrm>
-            <a:off x="457202" y="3579402"/>
-            <a:ext cx="8229596" cy="839337"/>
-          </a:xfrm>
-          <a:prstGeom prst="rect">
-            <a:avLst/>
-          </a:prstGeom>
-          <a:noFill/>
-          <a:ln w="9525">
-            <a:noFill/>
-            <a:headEnd/>
-            <a:tailEnd/>
-          </a:ln>
-        </p:spPr>
-      </p:pic>
     </p:spTree>
   </p:cSld>
 </p:sld>
@@ -14270,72 +14337,41 @@
             </a:pPr>
             <a:r>
               <a:rPr/>
-              <a:t>C is the price of a training error</a:t>
-            </a:r>
-          </a:p>
-        </p:txBody>
-      </p:sp>
-      <p:sp>
-        <p:nvSpPr>
-          <p:cNvPr id="3" name="Content Placeholder 2"/>
-          <p:cNvSpPr>
-            <a:spLocks noGrp="1"/>
-          </p:cNvSpPr>
-          <p:nvPr>
-            <p:ph idx="1"/>
-          </p:nvPr>
-        </p:nvSpPr>
-        <p:spPr>
+              <a:t>A wide slab, minus what the violations cost</a:t>
+            </a:r>
+          </a:p>
+        </p:txBody>
+      </p:sp>
+      <p:pic>
+        <p:nvPicPr>
+          <p:cNvPr descr="eq_d7392721ca.png" id="0" name="Picture 1"/>
+          <p:cNvPicPr>
+            <a:picLocks noGrp="1" noChangeAspect="1"/>
+          </p:cNvPicPr>
+          <p:nvPr/>
+        </p:nvPicPr>
+        <p:blipFill>
+          <a:blip r:embed="rId3"/>
+          <a:stretch>
+            <a:fillRect/>
+          </a:stretch>
+        </p:blipFill>
+        <p:spPr bwMode="auto">
           <a:xfrm>
-            <a:off x="457200" y="1200151"/>
-            <a:ext cx="8229600" cy="3394472"/>
+            <a:off x="457200" y="2433439"/>
+            <a:ext cx="8229600" cy="825500"/>
           </a:xfrm>
+          <a:prstGeom prst="rect">
+            <a:avLst/>
+          </a:prstGeom>
+          <a:noFill/>
+          <a:ln w="9525">
+            <a:noFill/>
+            <a:headEnd/>
+            <a:tailEnd/>
+          </a:ln>
         </p:spPr>
-        <p:txBody>
-          <a:bodyPr/>
-          <a:lstStyle/>
-          <a:p>
-            <a:pPr lvl="0"/>
-            <a:r>
-              <a:rPr b="1"/>
-              <a:t>Large C</a:t>
-            </a:r>
-            <a:r>
-              <a:rPr/>
-              <a:t>: violations are expensive, so the model contorts to classify everything. Narrow margin, low bias, high variance</a:t>
-            </a:r>
-          </a:p>
-          <a:p>
-            <a:pPr lvl="0"/>
-            <a:r>
-              <a:rPr b="1"/>
-              <a:t>Small C</a:t>
-            </a:r>
-            <a:r>
-              <a:rPr/>
-              <a:t>: a wider, calmer boundary, at the cost of some errors</a:t>
-            </a:r>
-          </a:p>
-          <a:p>
-            <a:pPr lvl="0"/>
-            <a:r>
-              <a:rPr/>
-              <a:t>The same dial as k in k-NN and λ in lesson 3, in a third costume</a:t>
-            </a:r>
-          </a:p>
-          <a:p>
-            <a:pPr lvl="0"/>
-            <a:r>
-              <a:rPr/>
-              <a:t>Note the direction: </a:t>
-            </a:r>
-            <a:r>
-              <a:rPr b="1"/>
-              <a:t>large C means less regularisation</a:t>
-            </a:r>
-          </a:p>
-        </p:txBody>
-      </p:sp>
+      </p:pic>
     </p:spTree>
   </p:cSld>
 </p:sld>
@@ -14448,6 +14484,119 @@
 </file>
 
 <file path=ppt/slides/slide40.xml><?xml version="1.0" encoding="utf-8"?>
+<p:sld xmlns:a="http://schemas.openxmlformats.org/drawingml/2006/main" xmlns:r="http://schemas.openxmlformats.org/officeDocument/2006/relationships" xmlns:p="http://schemas.openxmlformats.org/presentationml/2006/main">
+  <p:cSld>
+    <p:spTree>
+      <p:nvGrpSpPr>
+        <p:cNvPr id="1" name=""/>
+        <p:cNvGrpSpPr/>
+        <p:nvPr/>
+      </p:nvGrpSpPr>
+      <p:grpSpPr>
+        <a:xfrm>
+          <a:off x="0" y="0"/>
+          <a:ext cx="0" cy="0"/>
+          <a:chOff x="0" y="0"/>
+          <a:chExt cx="0" cy="0"/>
+        </a:xfrm>
+      </p:grpSpPr>
+      <p:sp>
+        <p:nvSpPr>
+          <p:cNvPr id="2" name="Title 1"/>
+          <p:cNvSpPr>
+            <a:spLocks noGrp="1"/>
+          </p:cNvSpPr>
+          <p:nvPr>
+            <p:ph type="title"/>
+          </p:nvPr>
+        </p:nvSpPr>
+        <p:spPr>
+          <a:xfrm>
+            <a:off x="457200" y="205979"/>
+            <a:ext cx="8229600" cy="857250"/>
+          </a:xfrm>
+        </p:spPr>
+        <p:txBody>
+          <a:bodyPr/>
+          <a:lstStyle/>
+          <a:p>
+            <a:pPr lvl="0" indent="0" marL="0">
+              <a:buNone/>
+            </a:pPr>
+            <a:r>
+              <a:rPr/>
+              <a:t>C is the price of a training error</a:t>
+            </a:r>
+          </a:p>
+        </p:txBody>
+      </p:sp>
+      <p:sp>
+        <p:nvSpPr>
+          <p:cNvPr id="3" name="Content Placeholder 2"/>
+          <p:cNvSpPr>
+            <a:spLocks noGrp="1"/>
+          </p:cNvSpPr>
+          <p:nvPr>
+            <p:ph idx="1"/>
+          </p:nvPr>
+        </p:nvSpPr>
+        <p:spPr>
+          <a:xfrm>
+            <a:off x="457200" y="1200151"/>
+            <a:ext cx="8229600" cy="3394472"/>
+          </a:xfrm>
+        </p:spPr>
+        <p:txBody>
+          <a:bodyPr/>
+          <a:lstStyle/>
+          <a:p>
+            <a:pPr lvl="0"/>
+            <a:r>
+              <a:rPr b="1"/>
+              <a:t>Large C</a:t>
+            </a:r>
+            <a:r>
+              <a:rPr/>
+              <a:t>: violations are expensive, so the model contorts to classify everything. Narrow margin, low bias, high variance</a:t>
+            </a:r>
+          </a:p>
+          <a:p>
+            <a:pPr lvl="0"/>
+            <a:r>
+              <a:rPr b="1"/>
+              <a:t>Small C</a:t>
+            </a:r>
+            <a:r>
+              <a:rPr/>
+              <a:t>: a wider, calmer boundary, at the cost of some errors</a:t>
+            </a:r>
+          </a:p>
+          <a:p>
+            <a:pPr lvl="0"/>
+            <a:r>
+              <a:rPr/>
+              <a:t>The same dial as k in k-NN and λ in lesson 3, in a third costume</a:t>
+            </a:r>
+          </a:p>
+          <a:p>
+            <a:pPr lvl="0"/>
+            <a:r>
+              <a:rPr/>
+              <a:t>Note the direction: </a:t>
+            </a:r>
+            <a:r>
+              <a:rPr b="1"/>
+              <a:t>large C means less regularisation</a:t>
+            </a:r>
+          </a:p>
+        </p:txBody>
+      </p:sp>
+    </p:spTree>
+  </p:cSld>
+</p:sld>
+</file>
+
+<file path=ppt/slides/slide41.xml><?xml version="1.0" encoding="utf-8"?>
 <p:sld xmlns:a="http://schemas.openxmlformats.org/drawingml/2006/main" xmlns:r="http://schemas.openxmlformats.org/officeDocument/2006/relationships" xmlns:p="http://schemas.openxmlformats.org/presentationml/2006/main">
   <p:cSld>
     <p:spTree>
@@ -14680,129 +14829,6 @@
 </p:sld>
 </file>
 
-<file path=ppt/slides/slide41.xml><?xml version="1.0" encoding="utf-8"?>
-<p:sld xmlns:a="http://schemas.openxmlformats.org/drawingml/2006/main" xmlns:r="http://schemas.openxmlformats.org/officeDocument/2006/relationships" xmlns:p="http://schemas.openxmlformats.org/presentationml/2006/main">
-  <p:cSld>
-    <p:spTree>
-      <p:nvGrpSpPr>
-        <p:cNvPr id="1" name=""/>
-        <p:cNvGrpSpPr/>
-        <p:nvPr/>
-      </p:nvGrpSpPr>
-      <p:grpSpPr>
-        <a:xfrm>
-          <a:off x="0" y="0"/>
-          <a:ext cx="0" cy="0"/>
-          <a:chOff x="0" y="0"/>
-          <a:chExt cx="0" cy="0"/>
-        </a:xfrm>
-      </p:grpSpPr>
-      <p:sp>
-        <p:nvSpPr>
-          <p:cNvPr id="2" name="Title 1"/>
-          <p:cNvSpPr>
-            <a:spLocks noGrp="1"/>
-          </p:cNvSpPr>
-          <p:nvPr>
-            <p:ph type="title"/>
-          </p:nvPr>
-        </p:nvSpPr>
-        <p:spPr>
-          <a:xfrm>
-            <a:off x="457200" y="205979"/>
-            <a:ext cx="8229600" cy="857250"/>
-          </a:xfrm>
-        </p:spPr>
-        <p:txBody>
-          <a:bodyPr/>
-          <a:lstStyle/>
-          <a:p>
-            <a:pPr lvl="0" indent="0" marL="0">
-              <a:buNone/>
-            </a:pPr>
-            <a:r>
-              <a:rPr/>
-              <a:t>A high support-vector fraction is a free warning</a:t>
-            </a:r>
-          </a:p>
-        </p:txBody>
-      </p:sp>
-      <p:sp>
-        <p:nvSpPr>
-          <p:cNvPr id="3" name="Content Placeholder 2"/>
-          <p:cNvSpPr>
-            <a:spLocks noGrp="1"/>
-          </p:cNvSpPr>
-          <p:nvPr>
-            <p:ph idx="1"/>
-          </p:nvPr>
-        </p:nvSpPr>
-        <p:spPr>
-          <a:xfrm>
-            <a:off x="457200" y="1200151"/>
-            <a:ext cx="8229600" cy="3394472"/>
-          </a:xfrm>
-        </p:spPr>
-        <p:txBody>
-          <a:bodyPr/>
-          <a:lstStyle/>
-          <a:p>
-            <a:pPr lvl="0"/>
-            <a:r>
-              <a:rPr/>
-              <a:t>The linear model needs </a:t>
-            </a:r>
-            <a:r>
-              <a:rPr b="1"/>
-              <a:t>79%</a:t>
-            </a:r>
-            <a:r>
-              <a:rPr/>
-              <a:t> of the training set to define its boundary</a:t>
-            </a:r>
-          </a:p>
-          <a:p>
-            <a:pPr lvl="0"/>
-            <a:r>
-              <a:rPr/>
-              <a:t>The RBF model needs </a:t>
-            </a:r>
-            <a:r>
-              <a:rPr b="1"/>
-              <a:t>23%</a:t>
-            </a:r>
-          </a:p>
-          <a:p>
-            <a:pPr lvl="0"/>
-            <a:r>
-              <a:rPr/>
-              <a:t>Almost every point sits on or inside the margin: there is no slab that separates anything</a:t>
-            </a:r>
-          </a:p>
-          <a:p>
-            <a:pPr lvl="0"/>
-            <a:r>
-              <a:rPr/>
-              <a:t>The count falls out of </a:t>
-            </a:r>
-            <a:r>
-              <a:rPr>
-                <a:latin typeface="Courier"/>
-              </a:rPr>
-              <a:t>fit</a:t>
-            </a:r>
-            <a:r>
-              <a:rPr/>
-              <a:t> at no cost, and you should look at it</a:t>
-            </a:r>
-          </a:p>
-        </p:txBody>
-      </p:sp>
-    </p:spTree>
-  </p:cSld>
-</p:sld>
-</file>
-
 <file path=ppt/slides/slide42.xml><?xml version="1.0" encoding="utf-8"?>
 <p:sld xmlns:a="http://schemas.openxmlformats.org/drawingml/2006/main" xmlns:r="http://schemas.openxmlformats.org/officeDocument/2006/relationships" xmlns:p="http://schemas.openxmlformats.org/presentationml/2006/main">
   <p:cSld>
@@ -14845,7 +14871,7 @@
             </a:pPr>
             <a:r>
               <a:rPr/>
-              <a:t>The kernel trick: they needed different coordinates</a:t>
+              <a:t>A high support-vector fraction is a free warning</a:t>
             </a:r>
           </a:p>
         </p:txBody>
@@ -14873,36 +14899,50 @@
             <a:pPr lvl="0"/>
             <a:r>
               <a:rPr/>
-              <a:t>Healthy pumps in a disc, faulty ones around it: no line works </a:t>
+              <a:t>The linear model needs </a:t>
             </a:r>
             <a:r>
               <a:rPr b="1"/>
-              <a:t>in the plane</a:t>
+              <a:t>79%</a:t>
+            </a:r>
+            <a:r>
+              <a:rPr/>
+              <a:t> of the training set to define its boundary</a:t>
             </a:r>
           </a:p>
           <a:p>
             <a:pPr lvl="0"/>
             <a:r>
               <a:rPr/>
-              <a:t>Add a third coordinate: the </a:t>
+              <a:t>The RBF model needs </a:t>
             </a:r>
             <a:r>
               <a:rPr b="1"/>
-              <a:t>distance from the design point</a:t>
+              <a:t>23%</a:t>
             </a:r>
           </a:p>
           <a:p>
             <a:pPr lvl="0"/>
             <a:r>
               <a:rPr/>
-              <a:t>Healthy pumps rise a little, faulty ones a lot, and a flat plane separates them perfectly</a:t>
+              <a:t>Almost every point sits on or inside the margin: there is no slab that separates anything</a:t>
             </a:r>
           </a:p>
           <a:p>
             <a:pPr lvl="0"/>
             <a:r>
               <a:rPr/>
-              <a:t>The classes were always separable. They were measured in the wrong coordinates</a:t>
+              <a:t>The count falls out of </a:t>
+            </a:r>
+            <a:r>
+              <a:rPr>
+                <a:latin typeface="Courier"/>
+              </a:rPr>
+              <a:t>fit</a:t>
+            </a:r>
+            <a:r>
+              <a:rPr/>
+              <a:t> at no cost, and you should look at it</a:t>
             </a:r>
           </a:p>
         </p:txBody>
@@ -14913,6 +14953,115 @@
 </file>
 
 <file path=ppt/slides/slide43.xml><?xml version="1.0" encoding="utf-8"?>
+<p:sld xmlns:a="http://schemas.openxmlformats.org/drawingml/2006/main" xmlns:r="http://schemas.openxmlformats.org/officeDocument/2006/relationships" xmlns:p="http://schemas.openxmlformats.org/presentationml/2006/main">
+  <p:cSld>
+    <p:spTree>
+      <p:nvGrpSpPr>
+        <p:cNvPr id="1" name=""/>
+        <p:cNvGrpSpPr/>
+        <p:nvPr/>
+      </p:nvGrpSpPr>
+      <p:grpSpPr>
+        <a:xfrm>
+          <a:off x="0" y="0"/>
+          <a:ext cx="0" cy="0"/>
+          <a:chOff x="0" y="0"/>
+          <a:chExt cx="0" cy="0"/>
+        </a:xfrm>
+      </p:grpSpPr>
+      <p:sp>
+        <p:nvSpPr>
+          <p:cNvPr id="2" name="Title 1"/>
+          <p:cNvSpPr>
+            <a:spLocks noGrp="1"/>
+          </p:cNvSpPr>
+          <p:nvPr>
+            <p:ph type="title"/>
+          </p:nvPr>
+        </p:nvSpPr>
+        <p:spPr>
+          <a:xfrm>
+            <a:off x="457200" y="205979"/>
+            <a:ext cx="8229600" cy="857250"/>
+          </a:xfrm>
+        </p:spPr>
+        <p:txBody>
+          <a:bodyPr/>
+          <a:lstStyle/>
+          <a:p>
+            <a:pPr lvl="0" indent="0" marL="0">
+              <a:buNone/>
+            </a:pPr>
+            <a:r>
+              <a:rPr/>
+              <a:t>The kernel trick: they needed different coordinates</a:t>
+            </a:r>
+          </a:p>
+        </p:txBody>
+      </p:sp>
+      <p:sp>
+        <p:nvSpPr>
+          <p:cNvPr id="3" name="Content Placeholder 2"/>
+          <p:cNvSpPr>
+            <a:spLocks noGrp="1"/>
+          </p:cNvSpPr>
+          <p:nvPr>
+            <p:ph idx="1"/>
+          </p:nvPr>
+        </p:nvSpPr>
+        <p:spPr>
+          <a:xfrm>
+            <a:off x="457200" y="1200151"/>
+            <a:ext cx="8229600" cy="3394472"/>
+          </a:xfrm>
+        </p:spPr>
+        <p:txBody>
+          <a:bodyPr/>
+          <a:lstStyle/>
+          <a:p>
+            <a:pPr lvl="0"/>
+            <a:r>
+              <a:rPr/>
+              <a:t>Healthy pumps in a disc, faulty ones around it: no line works </a:t>
+            </a:r>
+            <a:r>
+              <a:rPr b="1"/>
+              <a:t>in the plane</a:t>
+            </a:r>
+          </a:p>
+          <a:p>
+            <a:pPr lvl="0"/>
+            <a:r>
+              <a:rPr/>
+              <a:t>Add a third coordinate: the </a:t>
+            </a:r>
+            <a:r>
+              <a:rPr b="1"/>
+              <a:t>distance from the design point</a:t>
+            </a:r>
+          </a:p>
+          <a:p>
+            <a:pPr lvl="0"/>
+            <a:r>
+              <a:rPr/>
+              <a:t>Healthy pumps rise a little, faulty ones a lot, and a flat plane separates them perfectly</a:t>
+            </a:r>
+          </a:p>
+          <a:p>
+            <a:pPr lvl="0"/>
+            <a:r>
+              <a:rPr/>
+              <a:t>The classes were always separable. They were measured in the wrong coordinates</a:t>
+            </a:r>
+          </a:p>
+        </p:txBody>
+      </p:sp>
+    </p:spTree>
+  </p:cSld>
+</p:sld>
+</file>
+
+<file path=ppt/slides/slide44.xml><?xml version="1.0" encoding="utf-8"?>
 <p:sld xmlns:a="http://schemas.openxmlformats.org/drawingml/2006/main" xmlns:r="http://schemas.openxmlformats.org/officeDocument/2006/relationships" xmlns:p="http://schemas.openxmlformats.org/presentationml/2006/main">
   <p:cSld>
     <p:spTree>
@@ -14994,7 +15143,7 @@
 </p:sld>
 </file>
 
-<file path=ppt/slides/slide44.xml><?xml version="1.0" encoding="utf-8"?>
+<file path=ppt/slides/slide45.xml><?xml version="1.0" encoding="utf-8"?>
 <p:sld xmlns:a="http://schemas.openxmlformats.org/drawingml/2006/main" xmlns:r="http://schemas.openxmlformats.org/officeDocument/2006/relationships" xmlns:p="http://schemas.openxmlformats.org/presentationml/2006/main">
   <p:cSld>
     <p:spTree>
@@ -15112,7 +15261,7 @@
 </p:sld>
 </file>
 
-<file path=ppt/slides/slide45.xml><?xml version="1.0" encoding="utf-8"?>
+<file path=ppt/slides/slide46.xml><?xml version="1.0" encoding="utf-8"?>
 <p:sld xmlns:a="http://schemas.openxmlformats.org/drawingml/2006/main" xmlns:r="http://schemas.openxmlformats.org/officeDocument/2006/relationships" xmlns:p="http://schemas.openxmlformats.org/presentationml/2006/main">
   <p:cSld>
     <p:spTree>
@@ -15194,7 +15343,7 @@
 </p:sld>
 </file>
 
-<file path=ppt/slides/slide46.xml><?xml version="1.0" encoding="utf-8"?>
+<file path=ppt/slides/slide47.xml><?xml version="1.0" encoding="utf-8"?>
 <p:sld xmlns:a="http://schemas.openxmlformats.org/drawingml/2006/main" xmlns:r="http://schemas.openxmlformats.org/officeDocument/2006/relationships" xmlns:p="http://schemas.openxmlformats.org/presentationml/2006/main">
   <p:cSld>
     <p:spTree>
@@ -15466,7 +15615,7 @@
 </p:sld>
 </file>
 
-<file path=ppt/slides/slide47.xml><?xml version="1.0" encoding="utf-8"?>
+<file path=ppt/slides/slide48.xml><?xml version="1.0" encoding="utf-8"?>
 <p:sld xmlns:a="http://schemas.openxmlformats.org/drawingml/2006/main" xmlns:r="http://schemas.openxmlformats.org/officeDocument/2006/relationships" xmlns:p="http://schemas.openxmlformats.org/presentationml/2006/main">
   <p:cSld>
     <p:spTree>
@@ -15548,7 +15697,7 @@
 </p:sld>
 </file>
 
-<file path=ppt/slides/slide48.xml><?xml version="1.0" encoding="utf-8"?>
+<file path=ppt/slides/slide49.xml><?xml version="1.0" encoding="utf-8"?>
 <p:sld xmlns:a="http://schemas.openxmlformats.org/drawingml/2006/main" xmlns:r="http://schemas.openxmlformats.org/officeDocument/2006/relationships" xmlns:p="http://schemas.openxmlformats.org/presentationml/2006/main">
   <p:cSld>
     <p:spTree>
@@ -15628,7 +15777,89 @@
 </p:sld>
 </file>
 
-<file path=ppt/slides/slide49.xml><?xml version="1.0" encoding="utf-8"?>
+<file path=ppt/slides/slide5.xml><?xml version="1.0" encoding="utf-8"?>
+<p:sld xmlns:a="http://schemas.openxmlformats.org/drawingml/2006/main" xmlns:r="http://schemas.openxmlformats.org/officeDocument/2006/relationships" xmlns:p="http://schemas.openxmlformats.org/presentationml/2006/main">
+  <p:cSld>
+    <p:spTree>
+      <p:nvGrpSpPr>
+        <p:cNvPr id="1" name=""/>
+        <p:cNvGrpSpPr/>
+        <p:nvPr/>
+      </p:nvGrpSpPr>
+      <p:grpSpPr>
+        <a:xfrm>
+          <a:off x="0" y="0"/>
+          <a:ext cx="0" cy="0"/>
+          <a:chOff x="0" y="0"/>
+          <a:chExt cx="0" cy="0"/>
+        </a:xfrm>
+      </p:grpSpPr>
+      <p:sp>
+        <p:nvSpPr>
+          <p:cNvPr id="2" name="Title 1"/>
+          <p:cNvSpPr>
+            <a:spLocks noGrp="1"/>
+          </p:cNvSpPr>
+          <p:nvPr>
+            <p:ph type="title"/>
+          </p:nvPr>
+        </p:nvSpPr>
+        <p:spPr>
+          <a:xfrm>
+            <a:off x="457200" y="205979"/>
+            <a:ext cx="8229600" cy="857250"/>
+          </a:xfrm>
+        </p:spPr>
+        <p:txBody>
+          <a:bodyPr/>
+          <a:lstStyle/>
+          <a:p>
+            <a:pPr lvl="0" indent="0" marL="0">
+              <a:buNone/>
+            </a:pPr>
+            <a:r>
+              <a:rPr/>
+              <a:t>The shape of the problem</a:t>
+            </a:r>
+          </a:p>
+        </p:txBody>
+      </p:sp>
+      <p:pic>
+        <p:nvPicPr>
+          <p:cNvPr descr="pump_scatter.png" id="0" name="Picture 1"/>
+          <p:cNvPicPr>
+            <a:picLocks noGrp="1" noChangeAspect="1"/>
+          </p:cNvPicPr>
+          <p:nvPr/>
+        </p:nvPicPr>
+        <p:blipFill>
+          <a:blip r:embed="rId3"/>
+          <a:stretch>
+            <a:fillRect/>
+          </a:stretch>
+        </p:blipFill>
+        <p:spPr bwMode="auto">
+          <a:xfrm>
+            <a:off x="2445144" y="1166099"/>
+            <a:ext cx="4253712" cy="3360181"/>
+          </a:xfrm>
+          <a:prstGeom prst="rect">
+            <a:avLst/>
+          </a:prstGeom>
+          <a:noFill/>
+          <a:ln w="9525">
+            <a:noFill/>
+            <a:headEnd/>
+            <a:tailEnd/>
+          </a:ln>
+        </p:spPr>
+      </p:pic>
+    </p:spTree>
+  </p:cSld>
+</p:sld>
+</file>
+
+<file path=ppt/slides/slide50.xml><?xml version="1.0" encoding="utf-8"?>
 <p:sld xmlns:a="http://schemas.openxmlformats.org/drawingml/2006/main" xmlns:r="http://schemas.openxmlformats.org/officeDocument/2006/relationships" xmlns:p="http://schemas.openxmlformats.org/presentationml/2006/main">
   <p:cSld>
     <p:spTree>
@@ -15966,89 +16197,7 @@
 </p:sld>
 </file>
 
-<file path=ppt/slides/slide5.xml><?xml version="1.0" encoding="utf-8"?>
-<p:sld xmlns:a="http://schemas.openxmlformats.org/drawingml/2006/main" xmlns:r="http://schemas.openxmlformats.org/officeDocument/2006/relationships" xmlns:p="http://schemas.openxmlformats.org/presentationml/2006/main">
-  <p:cSld>
-    <p:spTree>
-      <p:nvGrpSpPr>
-        <p:cNvPr id="1" name=""/>
-        <p:cNvGrpSpPr/>
-        <p:nvPr/>
-      </p:nvGrpSpPr>
-      <p:grpSpPr>
-        <a:xfrm>
-          <a:off x="0" y="0"/>
-          <a:ext cx="0" cy="0"/>
-          <a:chOff x="0" y="0"/>
-          <a:chExt cx="0" cy="0"/>
-        </a:xfrm>
-      </p:grpSpPr>
-      <p:sp>
-        <p:nvSpPr>
-          <p:cNvPr id="2" name="Title 1"/>
-          <p:cNvSpPr>
-            <a:spLocks noGrp="1"/>
-          </p:cNvSpPr>
-          <p:nvPr>
-            <p:ph type="title"/>
-          </p:nvPr>
-        </p:nvSpPr>
-        <p:spPr>
-          <a:xfrm>
-            <a:off x="457200" y="205979"/>
-            <a:ext cx="8229600" cy="857250"/>
-          </a:xfrm>
-        </p:spPr>
-        <p:txBody>
-          <a:bodyPr/>
-          <a:lstStyle/>
-          <a:p>
-            <a:pPr lvl="0" indent="0" marL="0">
-              <a:buNone/>
-            </a:pPr>
-            <a:r>
-              <a:rPr/>
-              <a:t>The shape of the problem</a:t>
-            </a:r>
-          </a:p>
-        </p:txBody>
-      </p:sp>
-      <p:pic>
-        <p:nvPicPr>
-          <p:cNvPr descr="pump_scatter.png" id="0" name="Picture 1"/>
-          <p:cNvPicPr>
-            <a:picLocks noGrp="1" noChangeAspect="1"/>
-          </p:cNvPicPr>
-          <p:nvPr/>
-        </p:nvPicPr>
-        <p:blipFill>
-          <a:blip r:embed="rId3"/>
-          <a:stretch>
-            <a:fillRect/>
-          </a:stretch>
-        </p:blipFill>
-        <p:spPr bwMode="auto">
-          <a:xfrm>
-            <a:off x="2445144" y="1166099"/>
-            <a:ext cx="4253712" cy="3360181"/>
-          </a:xfrm>
-          <a:prstGeom prst="rect">
-            <a:avLst/>
-          </a:prstGeom>
-          <a:noFill/>
-          <a:ln w="9525">
-            <a:noFill/>
-            <a:headEnd/>
-            <a:tailEnd/>
-          </a:ln>
-        </p:spPr>
-      </p:pic>
-    </p:spTree>
-  </p:cSld>
-</p:sld>
-</file>
-
-<file path=ppt/slides/slide50.xml><?xml version="1.0" encoding="utf-8"?>
+<file path=ppt/slides/slide51.xml><?xml version="1.0" encoding="utf-8"?>
 <p:sld xmlns:a="http://schemas.openxmlformats.org/drawingml/2006/main" xmlns:r="http://schemas.openxmlformats.org/officeDocument/2006/relationships" xmlns:p="http://schemas.openxmlformats.org/presentationml/2006/main">
   <p:cSld>
     <p:spTree>
@@ -16326,7 +16475,7 @@
 </p:sld>
 </file>
 
-<file path=ppt/slides/slide51.xml><?xml version="1.0" encoding="utf-8"?>
+<file path=ppt/slides/slide52.xml><?xml version="1.0" encoding="utf-8"?>
 <p:sld xmlns:a="http://schemas.openxmlformats.org/drawingml/2006/main" xmlns:r="http://schemas.openxmlformats.org/officeDocument/2006/relationships" xmlns:p="http://schemas.openxmlformats.org/presentationml/2006/main">
   <p:cSld>
     <p:spTree>
@@ -16458,7 +16607,7 @@
 </p:sld>
 </file>
 
-<file path=ppt/slides/slide52.xml><?xml version="1.0" encoding="utf-8"?>
+<file path=ppt/slides/slide53.xml><?xml version="1.0" encoding="utf-8"?>
 <p:sld xmlns:a="http://schemas.openxmlformats.org/drawingml/2006/main" xmlns:r="http://schemas.openxmlformats.org/officeDocument/2006/relationships" xmlns:p="http://schemas.openxmlformats.org/presentationml/2006/main">
   <p:cSld>
     <p:spTree>

--- a/Lessons/06_knn_naive_bayes_svm/Slides/knn_naive_bayes_svm_slides.pptx
+++ b/Lessons/06_knn_naive_bayes_svm/Slides/knn_naive_bayes_svm_slides.pptx
@@ -6374,7 +6374,7 @@
             </a:pPr>
             <a:r>
               <a:rPr/>
-              <a:t>Set it explicitly and say the deadline out loud: next Friday, 6 November.</a:t>
+              <a:t>Set it explicitly and say the deadline out loud: next Friday, 6 November, 09:00, before lesson 7 starts.</a:t>
             </a:r>
           </a:p>
           <a:p>
@@ -16685,7 +16685,7 @@
             </a:r>
             <a:r>
               <a:rPr b="1"/>
-              <a:t>Friday 6 November 2026</a:t>
+              <a:t>Friday 6 November 2026, 09:00</a:t>
             </a:r>
           </a:p>
           <a:p>

--- a/Lessons/06_knn_naive_bayes_svm/Slides/knn_naive_bayes_svm_slides.pptx
+++ b/Lessons/06_knn_naive_bayes_svm/Slides/knn_naive_bayes_svm_slides.pptx
@@ -576,7 +576,7 @@
             </a:pPr>
             <a:r>
               <a:rPr/>
-              <a:t>Collect exercise 5. The marks were for the diagnosis, not for the final figure, so say one sentence about what the class found and one about what it missed.</a:t>
+              <a:t>Nothing to collect. What matters is the diagnosis, not the final figure, so ask the room what it found and listen for what it missed.</a:t>
             </a:r>
           </a:p>
           <a:p>
@@ -6374,7 +6374,7 @@
             </a:pPr>
             <a:r>
               <a:rPr/>
-              <a:t>Set it explicitly and say the deadline out loud: next Friday, 6 November, 09:00, before lesson 7 starts.</a:t>
+              <a:t>Set it explicitly and say out loud when it comes back: the first ten minutes of next Friday, 6 November.</a:t>
             </a:r>
           </a:p>
           <a:p>
@@ -11841,7 +11841,7 @@
             <a:pPr lvl="0"/>
             <a:r>
               <a:rPr/>
-              <a:t>Exercise 5 was due today</a:t>
+              <a:t>Exercise 5, which we discuss now</a:t>
             </a:r>
           </a:p>
           <a:p>
@@ -16681,11 +16681,11 @@
             </a:r>
             <a:r>
               <a:rPr/>
-              <a:t>, due </a:t>
+              <a:t>, discussed at the start of </a:t>
             </a:r>
             <a:r>
               <a:rPr b="1"/>
-              <a:t>Friday 6 November 2026, 09:00</a:t>
+              <a:t>Friday 6 November</a:t>
             </a:r>
           </a:p>
           <a:p>

--- a/Lessons/06_knn_naive_bayes_svm/Slides/knn_naive_bayes_svm_slides.pptx
+++ b/Lessons/06_knn_naive_bayes_svm/Slides/knn_naive_bayes_svm_slides.pptx
@@ -10229,7 +10229,7 @@
           </p:nvPr>
         </p:nvGraphicFramePr>
         <p:xfrm>
-          <a:off x="457200" y="1193800"/>
+          <a:off x="457200" y="1166099"/>
           <a:ext cx="8229600" cy="3390900"/>
         </p:xfrm>
         <a:graphic>
@@ -10993,7 +10993,7 @@
           </p:nvPr>
         </p:nvGraphicFramePr>
         <p:xfrm>
-          <a:off x="457200" y="1193800"/>
+          <a:off x="457200" y="1166099"/>
           <a:ext cx="8229600" cy="3390900"/>
         </p:xfrm>
         <a:graphic>
@@ -11555,7 +11555,7 @@
           </p:nvPr>
         </p:nvGraphicFramePr>
         <p:xfrm>
-          <a:off x="457200" y="1193800"/>
+          <a:off x="457200" y="1166099"/>
           <a:ext cx="8229600" cy="3390900"/>
         </p:xfrm>
         <a:graphic>
@@ -12423,8 +12423,8 @@
         </p:blipFill>
         <p:spPr bwMode="auto">
           <a:xfrm>
-            <a:off x="457200" y="2281039"/>
-            <a:ext cx="8229600" cy="1130300"/>
+            <a:off x="457200" y="2331839"/>
+            <a:ext cx="8229600" cy="1028700"/>
           </a:xfrm>
           <a:prstGeom prst="rect">
             <a:avLst/>
@@ -12599,8 +12599,8 @@
         </p:blipFill>
         <p:spPr bwMode="auto">
           <a:xfrm>
-            <a:off x="457200" y="1925439"/>
-            <a:ext cx="8229600" cy="1841500"/>
+            <a:off x="457202" y="1969890"/>
+            <a:ext cx="8229595" cy="1752599"/>
           </a:xfrm>
           <a:prstGeom prst="rect">
             <a:avLst/>
@@ -12789,7 +12789,7 @@
           </p:nvPr>
         </p:nvGraphicFramePr>
         <p:xfrm>
-          <a:off x="457200" y="1193800"/>
+          <a:off x="457200" y="1166099"/>
           <a:ext cx="8229600" cy="3390900"/>
         </p:xfrm>
         <a:graphic>
@@ -13159,7 +13159,7 @@
           </p:nvPr>
         </p:nvGraphicFramePr>
         <p:xfrm>
-          <a:off x="457200" y="1193800"/>
+          <a:off x="457200" y="1166099"/>
           <a:ext cx="8229600" cy="3390900"/>
         </p:xfrm>
         <a:graphic>
@@ -13553,7 +13553,7 @@
           </p:nvPr>
         </p:nvGraphicFramePr>
         <p:xfrm>
-          <a:off x="457200" y="1193800"/>
+          <a:off x="457200" y="1166099"/>
           <a:ext cx="8229600" cy="3390900"/>
         </p:xfrm>
         <a:graphic>
@@ -14358,8 +14358,8 @@
         </p:blipFill>
         <p:spPr bwMode="auto">
           <a:xfrm>
-            <a:off x="457200" y="2433439"/>
-            <a:ext cx="8229600" cy="825500"/>
+            <a:off x="457200" y="2458839"/>
+            <a:ext cx="8229599" cy="774700"/>
           </a:xfrm>
           <a:prstGeom prst="rect">
             <a:avLst/>
@@ -14654,7 +14654,7 @@
           </p:nvPr>
         </p:nvGraphicFramePr>
         <p:xfrm>
-          <a:off x="457200" y="1193800"/>
+          <a:off x="457200" y="1166099"/>
           <a:ext cx="8229600" cy="3390900"/>
         </p:xfrm>
         <a:graphic>
@@ -15324,8 +15324,8 @@
         </p:blipFill>
         <p:spPr bwMode="auto">
           <a:xfrm>
-            <a:off x="457200" y="2382639"/>
-            <a:ext cx="8229600" cy="927100"/>
+            <a:off x="457200" y="2433439"/>
+            <a:ext cx="8229600" cy="825500"/>
           </a:xfrm>
           <a:prstGeom prst="rect">
             <a:avLst/>
@@ -15401,7 +15401,7 @@
           </p:nvPr>
         </p:nvGraphicFramePr>
         <p:xfrm>
-          <a:off x="457200" y="1193800"/>
+          <a:off x="457200" y="1166099"/>
           <a:ext cx="8229600" cy="3390900"/>
         </p:xfrm>
         <a:graphic>
@@ -15917,7 +15917,7 @@
           </p:nvPr>
         </p:nvGraphicFramePr>
         <p:xfrm>
-          <a:off x="457200" y="1193800"/>
+          <a:off x="457200" y="1166099"/>
           <a:ext cx="8229600" cy="3390900"/>
         </p:xfrm>
         <a:graphic>
@@ -16255,7 +16255,7 @@
           </p:nvPr>
         </p:nvGraphicFramePr>
         <p:xfrm>
-          <a:off x="457200" y="1193800"/>
+          <a:off x="457200" y="1166099"/>
           <a:ext cx="8229600" cy="3390900"/>
         </p:xfrm>
         <a:graphic>
@@ -16760,7 +16760,7 @@
           </p:nvPr>
         </p:nvGraphicFramePr>
         <p:xfrm>
-          <a:off x="457200" y="1193800"/>
+          <a:off x="457200" y="1166099"/>
           <a:ext cx="8229600" cy="3390900"/>
         </p:xfrm>
         <a:graphic>
@@ -17057,8 +17057,8 @@
         </p:blipFill>
         <p:spPr bwMode="auto">
           <a:xfrm>
-            <a:off x="457200" y="1677789"/>
-            <a:ext cx="8229600" cy="2336800"/>
+            <a:off x="457200" y="1722239"/>
+            <a:ext cx="8229600" cy="2247900"/>
           </a:xfrm>
           <a:prstGeom prst="rect">
             <a:avLst/>

--- a/Lessons/06_knn_naive_bayes_svm/Slides/knn_naive_bayes_svm_slides.pptx
+++ b/Lessons/06_knn_naive_bayes_svm/Slides/knn_naive_bayes_svm_slides.pptx
@@ -12423,8 +12423,8 @@
         </p:blipFill>
         <p:spPr bwMode="auto">
           <a:xfrm>
-            <a:off x="457200" y="2331839"/>
-            <a:ext cx="8229600" cy="1028700"/>
+            <a:off x="457200" y="2281039"/>
+            <a:ext cx="8229600" cy="1130300"/>
           </a:xfrm>
           <a:prstGeom prst="rect">
             <a:avLst/>
@@ -12599,8 +12599,8 @@
         </p:blipFill>
         <p:spPr bwMode="auto">
           <a:xfrm>
-            <a:off x="457202" y="1969890"/>
-            <a:ext cx="8229595" cy="1752599"/>
+            <a:off x="457202" y="1957190"/>
+            <a:ext cx="8229595" cy="1777999"/>
           </a:xfrm>
           <a:prstGeom prst="rect">
             <a:avLst/>
@@ -17057,8 +17057,8 @@
         </p:blipFill>
         <p:spPr bwMode="auto">
           <a:xfrm>
-            <a:off x="457200" y="1722239"/>
-            <a:ext cx="8229600" cy="2247900"/>
+            <a:off x="457200" y="1715889"/>
+            <a:ext cx="8229600" cy="2260600"/>
           </a:xfrm>
           <a:prstGeom prst="rect">
             <a:avLst/>

--- a/Lessons/06_knn_naive_bayes_svm/Slides/knn_naive_bayes_svm_slides.pptx
+++ b/Lessons/06_knn_naive_bayes_svm/Slides/knn_naive_bayes_svm_slides.pptx
@@ -4380,6 +4380,20 @@
         <p:txBody>
           <a:bodyPr/>
           <a:lstStyle/>
+          <a:p>
+            <a:pPr lvl="0" indent="0" marL="0">
+              <a:buNone/>
+            </a:pPr>
+            <a:r>
+              <a:rPr/>
+              <a:t>The constraint is not on the slide any more - it made the line wide enough to land at 28pt - so state it: subject to y_i(w’x_i + b) &gt;= 1 - xi_i, every point on the right side of the slab by a margin, or paying xi_i for the shortfall. Handout section 5.2 writes it out.</a:t>
+            </a:r>
+          </a:p>
+          <a:p>
+            <a:pPr lvl="0" indent="0" marL="0">
+              <a:buNone/>
+            </a:pPr>
+          </a:p>
           <a:p>
             <a:pPr lvl="0" indent="0" marL="0">
               <a:buNone/>
@@ -14344,7 +14358,7 @@
       </p:sp>
       <p:pic>
         <p:nvPicPr>
-          <p:cNvPr descr="eq_d7392721ca.png" id="0" name="Picture 1"/>
+          <p:cNvPr descr="eq_1fab60605d.png" id="0" name="Picture 1"/>
           <p:cNvPicPr>
             <a:picLocks noGrp="1" noChangeAspect="1"/>
           </p:cNvPicPr>
@@ -14358,8 +14372,8 @@
         </p:blipFill>
         <p:spPr bwMode="auto">
           <a:xfrm>
-            <a:off x="457200" y="2458839"/>
-            <a:ext cx="8229599" cy="774700"/>
+            <a:off x="1280160" y="2068949"/>
+            <a:ext cx="6583680" cy="1554480"/>
           </a:xfrm>
           <a:prstGeom prst="rect">
             <a:avLst/>

--- a/Lessons/06_knn_naive_bayes_svm/Slides/knn_naive_bayes_svm_slides.pptx
+++ b/Lessons/06_knn_naive_bayes_svm/Slides/knn_naive_bayes_svm_slides.pptx
@@ -1458,7 +1458,7 @@
             </a:pPr>
             <a:r>
               <a:rPr/>
-              <a:t>Give the picture in words before any number appears.</a:t>
+              <a:t>Give the picture in words before showing it - the figure is on the next slide, and it lands better once they have pictured it themselves.</a:t>
             </a:r>
           </a:p>
           <a:p>
